--- a/public/lessons/year-6-maths/summer/week-30/retrieve-algebra-and-measure/teaching-powerpoint-v1.pptx
+++ b/public/lessons/year-6-maths/summer/week-30/retrieve-algebra-and-measure/teaching-powerpoint-v1.pptx
@@ -2,24 +2,24 @@
 <file path=ppt/presentation.xml><?xml version="1.0" encoding="utf-8"?>
 <p:presentation xmlns:p="http://schemas.openxmlformats.org/presentationml/2006/main">
   <p:sldMasterIdLst>
-    <p:sldMasterId xmlns:r="http://schemas.openxmlformats.org/officeDocument/2006/relationships" id="2147483648" r:id="R791e75d5c6da429c"/>
+    <p:sldMasterId xmlns:r="http://schemas.openxmlformats.org/officeDocument/2006/relationships" id="2147483648" r:id="R353e6c56884d40a9"/>
   </p:sldMasterIdLst>
   <p:notesMasterIdLst>
-    <p:notesMasterId xmlns:r="http://schemas.openxmlformats.org/officeDocument/2006/relationships" r:id="Rbc742f8e3c1e4a75"/>
+    <p:notesMasterId xmlns:r="http://schemas.openxmlformats.org/officeDocument/2006/relationships" r:id="R3794a8cb693846b5"/>
   </p:notesMasterIdLst>
   <p:sldIdLst>
-    <p:sldId xmlns:r="http://schemas.openxmlformats.org/officeDocument/2006/relationships" id="256" r:id="Rdeb9054a7cd842bb"/>
-    <p:sldId xmlns:r="http://schemas.openxmlformats.org/officeDocument/2006/relationships" id="257" r:id="Rb81fcd35969a49ca"/>
-    <p:sldId xmlns:r="http://schemas.openxmlformats.org/officeDocument/2006/relationships" id="258" r:id="Ra049765c64004b22"/>
-    <p:sldId xmlns:r="http://schemas.openxmlformats.org/officeDocument/2006/relationships" id="259" r:id="R3945f0385bd14755"/>
-    <p:sldId xmlns:r="http://schemas.openxmlformats.org/officeDocument/2006/relationships" id="260" r:id="R3d6280bca24a44a7"/>
-    <p:sldId xmlns:r="http://schemas.openxmlformats.org/officeDocument/2006/relationships" id="261" r:id="R3348ef35e8e84bd2"/>
-    <p:sldId xmlns:r="http://schemas.openxmlformats.org/officeDocument/2006/relationships" id="262" r:id="R4fe20d6b2e5d460c"/>
-    <p:sldId xmlns:r="http://schemas.openxmlformats.org/officeDocument/2006/relationships" id="263" r:id="R07d7aeb214f34a45"/>
-    <p:sldId xmlns:r="http://schemas.openxmlformats.org/officeDocument/2006/relationships" id="264" r:id="R400f7950f2bd4498"/>
-    <p:sldId xmlns:r="http://schemas.openxmlformats.org/officeDocument/2006/relationships" id="265" r:id="Rd402e5ea1c394895"/>
-    <p:sldId xmlns:r="http://schemas.openxmlformats.org/officeDocument/2006/relationships" id="266" r:id="R4c805b85a0344439"/>
-    <p:sldId xmlns:r="http://schemas.openxmlformats.org/officeDocument/2006/relationships" id="267" r:id="R3079ccb038514870"/>
+    <p:sldId xmlns:r="http://schemas.openxmlformats.org/officeDocument/2006/relationships" id="256" r:id="R32cd3296cc7c436b"/>
+    <p:sldId xmlns:r="http://schemas.openxmlformats.org/officeDocument/2006/relationships" id="257" r:id="Rc2f867d45091448a"/>
+    <p:sldId xmlns:r="http://schemas.openxmlformats.org/officeDocument/2006/relationships" id="258" r:id="R68eea3f5125749cf"/>
+    <p:sldId xmlns:r="http://schemas.openxmlformats.org/officeDocument/2006/relationships" id="259" r:id="Rbcb7e796f8b440de"/>
+    <p:sldId xmlns:r="http://schemas.openxmlformats.org/officeDocument/2006/relationships" id="260" r:id="R5d528757db704c38"/>
+    <p:sldId xmlns:r="http://schemas.openxmlformats.org/officeDocument/2006/relationships" id="261" r:id="Rbbdb31e4568f4d0b"/>
+    <p:sldId xmlns:r="http://schemas.openxmlformats.org/officeDocument/2006/relationships" id="262" r:id="R46717fc9ed8a4c8a"/>
+    <p:sldId xmlns:r="http://schemas.openxmlformats.org/officeDocument/2006/relationships" id="263" r:id="Ra3a246ecc1364e12"/>
+    <p:sldId xmlns:r="http://schemas.openxmlformats.org/officeDocument/2006/relationships" id="264" r:id="R0ab2e143640b43d0"/>
+    <p:sldId xmlns:r="http://schemas.openxmlformats.org/officeDocument/2006/relationships" id="265" r:id="Rf0438e0995ab4fe4"/>
+    <p:sldId xmlns:r="http://schemas.openxmlformats.org/officeDocument/2006/relationships" id="266" r:id="R9832d1659fcc4f70"/>
+    <p:sldId xmlns:r="http://schemas.openxmlformats.org/officeDocument/2006/relationships" id="267" r:id="R39629598ab50424a"/>
   </p:sldIdLst>
   <p:sldSz cx="12192000" cy="6858000"/>
   <p:notesSz cx="6858000" cy="9144000"/>
@@ -873,7 +873,7 @@
           <a:lstStyle xmlns:a="http://schemas.openxmlformats.org/drawingml/2006/main"/>
           <a:p xmlns:a="http://schemas.openxmlformats.org/drawingml/2006/main">
             <a:r>
-              <a:t>I do. Reveal the question, setup and each calculation stage one click at a time. Pupils watch before copying. Model answer: x = 13 and 3,450 m.</a:t>
+              <a:t>I do. Reveal the question, then reveal each mathematical change one click at a time. Point to the numbers and operation that changed before moving to the next line. Final answer: x = 13 and 3,450 m.</a:t>
             </a:r>
           </a:p>
         </p:txBody>
@@ -1291,7 +1291,7 @@
   </p:cSld>
   <p:clrMap bg1="lt1" tx1="dk1" bg2="lt2" tx2="dk2" accent1="accent1" accent2="accent2" accent3="accent3" accent4="accent4" accent5="accent5" accent6="accent6" hlink="hlink" folHlink="folHlink"/>
   <p:sldLayoutIdLst>
-    <p:sldLayoutId xmlns:r="http://schemas.openxmlformats.org/officeDocument/2006/relationships" id="2147483649" r:id="R19521de2ddc0402e"/>
+    <p:sldLayoutId xmlns:r="http://schemas.openxmlformats.org/officeDocument/2006/relationships" id="2147483649" r:id="R1e1b93ced5854d40"/>
   </p:sldLayoutIdLst>
   <p:txStyles>
     <p:titleStyle>
@@ -1842,7 +1842,7 @@
           <p:cNvPr id="12" name="">
             <a:extLst xmlns:a="http://schemas.openxmlformats.org/drawingml/2006/main">
               <a:ext uri="{FF2B5EF4-FFF2-40B4-BE49-F238E27FC236}">
-                <a16:creationId xmlns:a16="http://schemas.microsoft.com/office/drawing/2014/main" id="{D40740D4-4F71-4C82-8B47-CF2A08B1F6F1}"/>
+                <a16:creationId xmlns:a16="http://schemas.microsoft.com/office/drawing/2014/main" id="{A3EA68F1-9F74-4DE1-B2A4-A671C03AE8FD}"/>
               </a:ext>
             </a:extLst>
           </p:cNvPr>
@@ -1874,7 +1874,7 @@
           <p:cNvPr id="2" name="">
             <a:extLst xmlns:a="http://schemas.openxmlformats.org/drawingml/2006/main">
               <a:ext uri="{FF2B5EF4-FFF2-40B4-BE49-F238E27FC236}">
-                <a16:creationId xmlns:a16="http://schemas.microsoft.com/office/drawing/2014/main" id="{238B1D17-5B0E-446A-94C1-C31E6F4F62BC}"/>
+                <a16:creationId xmlns:a16="http://schemas.microsoft.com/office/drawing/2014/main" id="{E731FB85-FB58-4747-9C26-2BFA7FA6E728}"/>
               </a:ext>
             </a:extLst>
           </p:cNvPr>
@@ -1931,7 +1931,7 @@
           <p:cNvPr id="3" name="">
             <a:extLst xmlns:a="http://schemas.openxmlformats.org/drawingml/2006/main">
               <a:ext uri="{FF2B5EF4-FFF2-40B4-BE49-F238E27FC236}">
-                <a16:creationId xmlns:a16="http://schemas.microsoft.com/office/drawing/2014/main" id="{7A25BF2E-8DDD-4392-9204-FC62BE30A149}"/>
+                <a16:creationId xmlns:a16="http://schemas.microsoft.com/office/drawing/2014/main" id="{6EAA169C-D85D-4F58-9ADE-78A8FE68636C}"/>
               </a:ext>
             </a:extLst>
           </p:cNvPr>
@@ -1965,7 +1965,7 @@
           <p:cNvPr id="4" name="">
             <a:extLst xmlns:a="http://schemas.openxmlformats.org/drawingml/2006/main">
               <a:ext uri="{FF2B5EF4-FFF2-40B4-BE49-F238E27FC236}">
-                <a16:creationId xmlns:a16="http://schemas.microsoft.com/office/drawing/2014/main" id="{E92D6627-B903-4422-B9F7-002821873AFD}"/>
+                <a16:creationId xmlns:a16="http://schemas.microsoft.com/office/drawing/2014/main" id="{0F74DE45-C34B-470C-8C40-38E6901B892F}"/>
               </a:ext>
             </a:extLst>
           </p:cNvPr>
@@ -2022,7 +2022,7 @@
           <p:cNvPr id="5" name="">
             <a:extLst xmlns:a="http://schemas.openxmlformats.org/drawingml/2006/main">
               <a:ext uri="{FF2B5EF4-FFF2-40B4-BE49-F238E27FC236}">
-                <a16:creationId xmlns:a16="http://schemas.microsoft.com/office/drawing/2014/main" id="{5C4FD738-C913-46C9-8D68-826682B9152A}"/>
+                <a16:creationId xmlns:a16="http://schemas.microsoft.com/office/drawing/2014/main" id="{05C3756D-D619-4E83-A90E-77B8CB2E4E5D}"/>
               </a:ext>
             </a:extLst>
           </p:cNvPr>
@@ -2079,7 +2079,7 @@
           <p:cNvPr id="6" name="">
             <a:extLst xmlns:a="http://schemas.openxmlformats.org/drawingml/2006/main">
               <a:ext uri="{FF2B5EF4-FFF2-40B4-BE49-F238E27FC236}">
-                <a16:creationId xmlns:a16="http://schemas.microsoft.com/office/drawing/2014/main" id="{DCB13D89-C10F-4A52-8F7C-4A4D38F0457B}"/>
+                <a16:creationId xmlns:a16="http://schemas.microsoft.com/office/drawing/2014/main" id="{1C3FBE88-CE8D-4ED9-A973-FEB59A916CC7}"/>
               </a:ext>
             </a:extLst>
           </p:cNvPr>
@@ -2113,7 +2113,7 @@
           <p:cNvPr id="7" name="">
             <a:extLst xmlns:a="http://schemas.openxmlformats.org/drawingml/2006/main">
               <a:ext uri="{FF2B5EF4-FFF2-40B4-BE49-F238E27FC236}">
-                <a16:creationId xmlns:a16="http://schemas.microsoft.com/office/drawing/2014/main" id="{A3CFC1B0-352F-46F2-A2EE-B6E9CFB374D2}"/>
+                <a16:creationId xmlns:a16="http://schemas.microsoft.com/office/drawing/2014/main" id="{0C55FEB6-1FC6-4230-86D3-EE823138D39E}"/>
               </a:ext>
             </a:extLst>
           </p:cNvPr>
@@ -2170,7 +2170,7 @@
           <p:cNvPr id="8" name="">
             <a:extLst xmlns:a="http://schemas.openxmlformats.org/drawingml/2006/main">
               <a:ext uri="{FF2B5EF4-FFF2-40B4-BE49-F238E27FC236}">
-                <a16:creationId xmlns:a16="http://schemas.microsoft.com/office/drawing/2014/main" id="{A3A3D3FB-B02F-4C54-9C17-F0BB8D95EA75}"/>
+                <a16:creationId xmlns:a16="http://schemas.microsoft.com/office/drawing/2014/main" id="{87C636B6-6494-4CBD-B8D5-DAD09AB65EE5}"/>
               </a:ext>
             </a:extLst>
           </p:cNvPr>
@@ -2227,7 +2227,7 @@
           <p:cNvPr id="9" name="">
             <a:extLst xmlns:a="http://schemas.openxmlformats.org/drawingml/2006/main">
               <a:ext uri="{FF2B5EF4-FFF2-40B4-BE49-F238E27FC236}">
-                <a16:creationId xmlns:a16="http://schemas.microsoft.com/office/drawing/2014/main" id="{35B05D15-C66A-460D-BCC4-1C2D7E46F715}"/>
+                <a16:creationId xmlns:a16="http://schemas.microsoft.com/office/drawing/2014/main" id="{0605097C-8C44-4F00-8194-4D4C8810FE75}"/>
               </a:ext>
             </a:extLst>
           </p:cNvPr>
@@ -2284,7 +2284,7 @@
           <p:cNvPr id="10" name="">
             <a:extLst xmlns:a="http://schemas.openxmlformats.org/drawingml/2006/main">
               <a:ext uri="{FF2B5EF4-FFF2-40B4-BE49-F238E27FC236}">
-                <a16:creationId xmlns:a16="http://schemas.microsoft.com/office/drawing/2014/main" id="{4EB9CEEA-CC21-48CB-AEE6-CC6542F8E745}"/>
+                <a16:creationId xmlns:a16="http://schemas.microsoft.com/office/drawing/2014/main" id="{F7070637-CC7C-47CF-8376-A4EA94436BF1}"/>
               </a:ext>
             </a:extLst>
           </p:cNvPr>
@@ -2341,7 +2341,7 @@
           <p:cNvPr id="11" name="">
             <a:extLst xmlns:a="http://schemas.openxmlformats.org/drawingml/2006/main">
               <a:ext uri="{FF2B5EF4-FFF2-40B4-BE49-F238E27FC236}">
-                <a16:creationId xmlns:a16="http://schemas.microsoft.com/office/drawing/2014/main" id="{164C60A5-A8B8-4DF0-A771-58AD6E736F2F}"/>
+                <a16:creationId xmlns:a16="http://schemas.microsoft.com/office/drawing/2014/main" id="{5AE20E5F-4FC3-4D53-8AE6-5A6076CA3B2E}"/>
               </a:ext>
             </a:extLst>
           </p:cNvPr>
@@ -2396,7 +2396,7 @@
     </p:spTree>
     <p:extLst>
       <p:ext uri="{BB962C8B-B14F-4D97-AF65-F5344CB8AC3E}">
-        <p14:creationId xmlns:p14="http://schemas.microsoft.com/office/powerpoint/2010/main" val="993887694"/>
+        <p14:creationId xmlns:p14="http://schemas.microsoft.com/office/powerpoint/2010/main" val="1795153759"/>
       </p:ext>
     </p:extLst>
   </p:cSld>
@@ -2427,7 +2427,7 @@
           <p:cNvPr id="14" name="">
             <a:extLst xmlns:a="http://schemas.openxmlformats.org/drawingml/2006/main">
               <a:ext uri="{FF2B5EF4-FFF2-40B4-BE49-F238E27FC236}">
-                <a16:creationId xmlns:a16="http://schemas.microsoft.com/office/drawing/2014/main" id="{E3840805-67C0-450F-A12F-190BFF36F4B3}"/>
+                <a16:creationId xmlns:a16="http://schemas.microsoft.com/office/drawing/2014/main" id="{7847D85C-DE2F-48B7-87C3-495447B97DEC}"/>
               </a:ext>
             </a:extLst>
           </p:cNvPr>
@@ -2459,7 +2459,7 @@
           <p:cNvPr id="2" name="">
             <a:extLst xmlns:a="http://schemas.openxmlformats.org/drawingml/2006/main">
               <a:ext uri="{FF2B5EF4-FFF2-40B4-BE49-F238E27FC236}">
-                <a16:creationId xmlns:a16="http://schemas.microsoft.com/office/drawing/2014/main" id="{8DC6A10E-5A35-4EAF-8FCC-A5DEB75A8A4D}"/>
+                <a16:creationId xmlns:a16="http://schemas.microsoft.com/office/drawing/2014/main" id="{E88D07AD-49ED-4E0E-B816-56286A3D2D95}"/>
               </a:ext>
             </a:extLst>
           </p:cNvPr>
@@ -2516,7 +2516,7 @@
           <p:cNvPr id="3" name="">
             <a:extLst xmlns:a="http://schemas.openxmlformats.org/drawingml/2006/main">
               <a:ext uri="{FF2B5EF4-FFF2-40B4-BE49-F238E27FC236}">
-                <a16:creationId xmlns:a16="http://schemas.microsoft.com/office/drawing/2014/main" id="{D1F36694-390E-4272-8B5D-9CE674FE0221}"/>
+                <a16:creationId xmlns:a16="http://schemas.microsoft.com/office/drawing/2014/main" id="{E921BF03-6E74-49D4-852D-03FCC5BCB95D}"/>
               </a:ext>
             </a:extLst>
           </p:cNvPr>
@@ -2548,7 +2548,7 @@
           <p:cNvPr id="4" name="">
             <a:extLst xmlns:a="http://schemas.openxmlformats.org/drawingml/2006/main">
               <a:ext uri="{FF2B5EF4-FFF2-40B4-BE49-F238E27FC236}">
-                <a16:creationId xmlns:a16="http://schemas.microsoft.com/office/drawing/2014/main" id="{3E25431F-C21E-4A43-AB66-8284A2498713}"/>
+                <a16:creationId xmlns:a16="http://schemas.microsoft.com/office/drawing/2014/main" id="{3649E838-3494-4D28-974C-C3D95EF0811E}"/>
               </a:ext>
             </a:extLst>
           </p:cNvPr>
@@ -2605,7 +2605,7 @@
           <p:cNvPr id="5" name="">
             <a:extLst xmlns:a="http://schemas.openxmlformats.org/drawingml/2006/main">
               <a:ext uri="{FF2B5EF4-FFF2-40B4-BE49-F238E27FC236}">
-                <a16:creationId xmlns:a16="http://schemas.microsoft.com/office/drawing/2014/main" id="{52DB4219-2810-4F4F-834F-4BABB8A0C14D}"/>
+                <a16:creationId xmlns:a16="http://schemas.microsoft.com/office/drawing/2014/main" id="{CB84DFC9-D480-4269-9438-60F1904F3594}"/>
               </a:ext>
             </a:extLst>
           </p:cNvPr>
@@ -2662,7 +2662,7 @@
           <p:cNvPr id="6" name="">
             <a:extLst xmlns:a="http://schemas.openxmlformats.org/drawingml/2006/main">
               <a:ext uri="{FF2B5EF4-FFF2-40B4-BE49-F238E27FC236}">
-                <a16:creationId xmlns:a16="http://schemas.microsoft.com/office/drawing/2014/main" id="{B8A38018-949D-4130-B6C3-7CCB4FCB85FC}"/>
+                <a16:creationId xmlns:a16="http://schemas.microsoft.com/office/drawing/2014/main" id="{31E7F026-FE41-47AC-AA92-DF2A4D142010}"/>
               </a:ext>
             </a:extLst>
           </p:cNvPr>
@@ -2719,7 +2719,7 @@
           <p:cNvPr id="7" name="">
             <a:extLst xmlns:a="http://schemas.openxmlformats.org/drawingml/2006/main">
               <a:ext uri="{FF2B5EF4-FFF2-40B4-BE49-F238E27FC236}">
-                <a16:creationId xmlns:a16="http://schemas.microsoft.com/office/drawing/2014/main" id="{5A5EA43F-0B45-4126-8987-F37FBD74ACDE}"/>
+                <a16:creationId xmlns:a16="http://schemas.microsoft.com/office/drawing/2014/main" id="{802A73DD-7231-4EE7-8B51-BA82B8997330}"/>
               </a:ext>
             </a:extLst>
           </p:cNvPr>
@@ -2751,7 +2751,7 @@
           <p:cNvPr id="8" name="">
             <a:extLst xmlns:a="http://schemas.openxmlformats.org/drawingml/2006/main">
               <a:ext uri="{FF2B5EF4-FFF2-40B4-BE49-F238E27FC236}">
-                <a16:creationId xmlns:a16="http://schemas.microsoft.com/office/drawing/2014/main" id="{ADC84FD2-8EC2-4E31-9BB4-D4772C40E20F}"/>
+                <a16:creationId xmlns:a16="http://schemas.microsoft.com/office/drawing/2014/main" id="{2173D361-6122-485E-B9D1-7AD1BD5695FF}"/>
               </a:ext>
             </a:extLst>
           </p:cNvPr>
@@ -2808,7 +2808,7 @@
           <p:cNvPr id="9" name="">
             <a:extLst xmlns:a="http://schemas.openxmlformats.org/drawingml/2006/main">
               <a:ext uri="{FF2B5EF4-FFF2-40B4-BE49-F238E27FC236}">
-                <a16:creationId xmlns:a16="http://schemas.microsoft.com/office/drawing/2014/main" id="{0912C4D1-896F-4779-8368-70C61F4E45DE}"/>
+                <a16:creationId xmlns:a16="http://schemas.microsoft.com/office/drawing/2014/main" id="{FB1D94D6-B131-45BE-AE1D-B3F6FE866902}"/>
               </a:ext>
             </a:extLst>
           </p:cNvPr>
@@ -2865,7 +2865,7 @@
           <p:cNvPr id="10" name="">
             <a:extLst xmlns:a="http://schemas.openxmlformats.org/drawingml/2006/main">
               <a:ext uri="{FF2B5EF4-FFF2-40B4-BE49-F238E27FC236}">
-                <a16:creationId xmlns:a16="http://schemas.microsoft.com/office/drawing/2014/main" id="{0D23D5BD-9805-4DA0-A92F-6A1A67DBF585}"/>
+                <a16:creationId xmlns:a16="http://schemas.microsoft.com/office/drawing/2014/main" id="{4AC49777-56E4-4B31-9B7F-8692EA72B204}"/>
               </a:ext>
             </a:extLst>
           </p:cNvPr>
@@ -2922,7 +2922,7 @@
           <p:cNvPr id="11" name="">
             <a:extLst xmlns:a="http://schemas.openxmlformats.org/drawingml/2006/main">
               <a:ext uri="{FF2B5EF4-FFF2-40B4-BE49-F238E27FC236}">
-                <a16:creationId xmlns:a16="http://schemas.microsoft.com/office/drawing/2014/main" id="{92994D25-64DA-4AFD-A9B2-CC67B8436D53}"/>
+                <a16:creationId xmlns:a16="http://schemas.microsoft.com/office/drawing/2014/main" id="{4E711016-E209-40E9-9BFD-423B6A6E8DC5}"/>
               </a:ext>
             </a:extLst>
           </p:cNvPr>
@@ -2979,7 +2979,7 @@
           <p:cNvPr id="12" name="">
             <a:extLst xmlns:a="http://schemas.openxmlformats.org/drawingml/2006/main">
               <a:ext uri="{FF2B5EF4-FFF2-40B4-BE49-F238E27FC236}">
-                <a16:creationId xmlns:a16="http://schemas.microsoft.com/office/drawing/2014/main" id="{BF696EFC-1D21-446D-921E-3A8CD13793C7}"/>
+                <a16:creationId xmlns:a16="http://schemas.microsoft.com/office/drawing/2014/main" id="{2DAC3815-D682-400C-90EF-661C2D4843A1}"/>
               </a:ext>
             </a:extLst>
           </p:cNvPr>
@@ -3036,7 +3036,7 @@
           <p:cNvPr id="13" name="">
             <a:extLst xmlns:a="http://schemas.openxmlformats.org/drawingml/2006/main">
               <a:ext uri="{FF2B5EF4-FFF2-40B4-BE49-F238E27FC236}">
-                <a16:creationId xmlns:a16="http://schemas.microsoft.com/office/drawing/2014/main" id="{E1B19AE2-DDFB-4484-973A-101D9B505859}"/>
+                <a16:creationId xmlns:a16="http://schemas.microsoft.com/office/drawing/2014/main" id="{02AD20B1-59AD-48AC-8A25-83512CACCC3A}"/>
               </a:ext>
             </a:extLst>
           </p:cNvPr>
@@ -3091,7 +3091,7 @@
     </p:spTree>
     <p:extLst>
       <p:ext uri="{BB962C8B-B14F-4D97-AF65-F5344CB8AC3E}">
-        <p14:creationId xmlns:p14="http://schemas.microsoft.com/office/powerpoint/2010/main" val="1036295681"/>
+        <p14:creationId xmlns:p14="http://schemas.microsoft.com/office/powerpoint/2010/main" val="854046612"/>
       </p:ext>
     </p:extLst>
   </p:cSld>
@@ -3292,7 +3292,7 @@
           <p:cNvPr id="19" name="">
             <a:extLst xmlns:a="http://schemas.openxmlformats.org/drawingml/2006/main">
               <a:ext uri="{FF2B5EF4-FFF2-40B4-BE49-F238E27FC236}">
-                <a16:creationId xmlns:a16="http://schemas.microsoft.com/office/drawing/2014/main" id="{3B599967-EBA5-4577-87AC-2CD8AEC2890C}"/>
+                <a16:creationId xmlns:a16="http://schemas.microsoft.com/office/drawing/2014/main" id="{1A23ED76-0A63-4CB1-B589-ECCEBA55CD65}"/>
               </a:ext>
             </a:extLst>
           </p:cNvPr>
@@ -3324,7 +3324,7 @@
           <p:cNvPr id="2" name="">
             <a:extLst xmlns:a="http://schemas.openxmlformats.org/drawingml/2006/main">
               <a:ext uri="{FF2B5EF4-FFF2-40B4-BE49-F238E27FC236}">
-                <a16:creationId xmlns:a16="http://schemas.microsoft.com/office/drawing/2014/main" id="{03743109-B240-4802-9D8B-A3B967425928}"/>
+                <a16:creationId xmlns:a16="http://schemas.microsoft.com/office/drawing/2014/main" id="{0898F093-E170-4F75-85E6-FE32E46AFBAD}"/>
               </a:ext>
             </a:extLst>
           </p:cNvPr>
@@ -3381,7 +3381,7 @@
           <p:cNvPr id="3" name="">
             <a:extLst xmlns:a="http://schemas.openxmlformats.org/drawingml/2006/main">
               <a:ext uri="{FF2B5EF4-FFF2-40B4-BE49-F238E27FC236}">
-                <a16:creationId xmlns:a16="http://schemas.microsoft.com/office/drawing/2014/main" id="{1B9F445E-D6DA-44A1-ABB1-49EE5DFDE738}"/>
+                <a16:creationId xmlns:a16="http://schemas.microsoft.com/office/drawing/2014/main" id="{1B68CE11-46E6-410C-A9A9-4A9E34C9E5B5}"/>
               </a:ext>
             </a:extLst>
           </p:cNvPr>
@@ -3413,7 +3413,7 @@
           <p:cNvPr id="4" name="">
             <a:extLst xmlns:a="http://schemas.openxmlformats.org/drawingml/2006/main">
               <a:ext uri="{FF2B5EF4-FFF2-40B4-BE49-F238E27FC236}">
-                <a16:creationId xmlns:a16="http://schemas.microsoft.com/office/drawing/2014/main" id="{D12ABB73-FC1C-47D0-BFC6-96280E3ACB45}"/>
+                <a16:creationId xmlns:a16="http://schemas.microsoft.com/office/drawing/2014/main" id="{887A2B17-591A-48D1-8578-DA18E6B605F3}"/>
               </a:ext>
             </a:extLst>
           </p:cNvPr>
@@ -3470,7 +3470,7 @@
           <p:cNvPr id="5" name="">
             <a:extLst xmlns:a="http://schemas.openxmlformats.org/drawingml/2006/main">
               <a:ext uri="{FF2B5EF4-FFF2-40B4-BE49-F238E27FC236}">
-                <a16:creationId xmlns:a16="http://schemas.microsoft.com/office/drawing/2014/main" id="{7F9DDCDA-C43C-49FD-BE84-C7419EE253E4}"/>
+                <a16:creationId xmlns:a16="http://schemas.microsoft.com/office/drawing/2014/main" id="{1F60CD26-3CDD-4A05-A5DF-F4F2B23C1B8F}"/>
               </a:ext>
             </a:extLst>
           </p:cNvPr>
@@ -3527,7 +3527,7 @@
           <p:cNvPr id="6" name="">
             <a:extLst xmlns:a="http://schemas.openxmlformats.org/drawingml/2006/main">
               <a:ext uri="{FF2B5EF4-FFF2-40B4-BE49-F238E27FC236}">
-                <a16:creationId xmlns:a16="http://schemas.microsoft.com/office/drawing/2014/main" id="{EEE62285-E295-4E4C-AD60-C3D217074412}"/>
+                <a16:creationId xmlns:a16="http://schemas.microsoft.com/office/drawing/2014/main" id="{5DBBB193-0BA6-4689-8C4C-A90A0BE162EE}"/>
               </a:ext>
             </a:extLst>
           </p:cNvPr>
@@ -3584,7 +3584,7 @@
           <p:cNvPr id="7" name="">
             <a:extLst xmlns:a="http://schemas.openxmlformats.org/drawingml/2006/main">
               <a:ext uri="{FF2B5EF4-FFF2-40B4-BE49-F238E27FC236}">
-                <a16:creationId xmlns:a16="http://schemas.microsoft.com/office/drawing/2014/main" id="{F7AF61EA-9D05-465A-AD96-BA4874E67B52}"/>
+                <a16:creationId xmlns:a16="http://schemas.microsoft.com/office/drawing/2014/main" id="{51721AD9-7B43-49C0-AAD6-1287C2CB1941}"/>
               </a:ext>
             </a:extLst>
           </p:cNvPr>
@@ -3616,7 +3616,7 @@
           <p:cNvPr id="8" name="">
             <a:extLst xmlns:a="http://schemas.openxmlformats.org/drawingml/2006/main">
               <a:ext uri="{FF2B5EF4-FFF2-40B4-BE49-F238E27FC236}">
-                <a16:creationId xmlns:a16="http://schemas.microsoft.com/office/drawing/2014/main" id="{9B330222-0138-4D06-8F15-746F5EB42DDA}"/>
+                <a16:creationId xmlns:a16="http://schemas.microsoft.com/office/drawing/2014/main" id="{F280C327-6F41-4241-ACB6-12DEDBEFE9E6}"/>
               </a:ext>
             </a:extLst>
           </p:cNvPr>
@@ -3673,7 +3673,7 @@
           <p:cNvPr id="9" name="">
             <a:extLst xmlns:a="http://schemas.openxmlformats.org/drawingml/2006/main">
               <a:ext uri="{FF2B5EF4-FFF2-40B4-BE49-F238E27FC236}">
-                <a16:creationId xmlns:a16="http://schemas.microsoft.com/office/drawing/2014/main" id="{875F1102-6B84-403D-9DAF-EE41B0928310}"/>
+                <a16:creationId xmlns:a16="http://schemas.microsoft.com/office/drawing/2014/main" id="{24AAC423-6812-41D7-B4EC-ECBDA41E8B70}"/>
               </a:ext>
             </a:extLst>
           </p:cNvPr>
@@ -3730,7 +3730,7 @@
           <p:cNvPr id="10" name="">
             <a:extLst xmlns:a="http://schemas.openxmlformats.org/drawingml/2006/main">
               <a:ext uri="{FF2B5EF4-FFF2-40B4-BE49-F238E27FC236}">
-                <a16:creationId xmlns:a16="http://schemas.microsoft.com/office/drawing/2014/main" id="{BBB4F50E-4BD8-428D-889D-167971F20FCF}"/>
+                <a16:creationId xmlns:a16="http://schemas.microsoft.com/office/drawing/2014/main" id="{25EE4413-8A0A-4D8E-B377-DD1C4B927BF1}"/>
               </a:ext>
             </a:extLst>
           </p:cNvPr>
@@ -3787,7 +3787,7 @@
           <p:cNvPr id="11" name="">
             <a:extLst xmlns:a="http://schemas.openxmlformats.org/drawingml/2006/main">
               <a:ext uri="{FF2B5EF4-FFF2-40B4-BE49-F238E27FC236}">
-                <a16:creationId xmlns:a16="http://schemas.microsoft.com/office/drawing/2014/main" id="{916D6845-AAF8-42CC-8BA5-EF2BA1DCACEB}"/>
+                <a16:creationId xmlns:a16="http://schemas.microsoft.com/office/drawing/2014/main" id="{972800CF-0067-4869-A2AF-3E3F30A253E9}"/>
               </a:ext>
             </a:extLst>
           </p:cNvPr>
@@ -3821,7 +3821,7 @@
           <p:cNvPr id="12" name="">
             <a:extLst xmlns:a="http://schemas.openxmlformats.org/drawingml/2006/main">
               <a:ext uri="{FF2B5EF4-FFF2-40B4-BE49-F238E27FC236}">
-                <a16:creationId xmlns:a16="http://schemas.microsoft.com/office/drawing/2014/main" id="{330683BF-78C3-48CC-89A3-FC01C3854605}"/>
+                <a16:creationId xmlns:a16="http://schemas.microsoft.com/office/drawing/2014/main" id="{B5995B0C-56CE-4C88-8404-767386AE0FCF}"/>
               </a:ext>
             </a:extLst>
           </p:cNvPr>
@@ -3878,7 +3878,7 @@
           <p:cNvPr id="13" name="">
             <a:extLst xmlns:a="http://schemas.openxmlformats.org/drawingml/2006/main">
               <a:ext uri="{FF2B5EF4-FFF2-40B4-BE49-F238E27FC236}">
-                <a16:creationId xmlns:a16="http://schemas.microsoft.com/office/drawing/2014/main" id="{81A04ADC-436B-4DA8-A92F-34C06656B924}"/>
+                <a16:creationId xmlns:a16="http://schemas.microsoft.com/office/drawing/2014/main" id="{5E59E461-B174-403C-ACAF-D4084A10B5CC}"/>
               </a:ext>
             </a:extLst>
           </p:cNvPr>
@@ -3935,7 +3935,7 @@
           <p:cNvPr id="14" name="">
             <a:extLst xmlns:a="http://schemas.openxmlformats.org/drawingml/2006/main">
               <a:ext uri="{FF2B5EF4-FFF2-40B4-BE49-F238E27FC236}">
-                <a16:creationId xmlns:a16="http://schemas.microsoft.com/office/drawing/2014/main" id="{5AD01003-473A-4453-BFE0-1BFD7AF93AB6}"/>
+                <a16:creationId xmlns:a16="http://schemas.microsoft.com/office/drawing/2014/main" id="{E96DBA00-D744-43B6-8D0B-94CCEA7CE467}"/>
               </a:ext>
             </a:extLst>
           </p:cNvPr>
@@ -3992,7 +3992,7 @@
           <p:cNvPr id="15" name="">
             <a:extLst xmlns:a="http://schemas.openxmlformats.org/drawingml/2006/main">
               <a:ext uri="{FF2B5EF4-FFF2-40B4-BE49-F238E27FC236}">
-                <a16:creationId xmlns:a16="http://schemas.microsoft.com/office/drawing/2014/main" id="{174C8085-61A5-4992-8DD3-90F8798ADDF0}"/>
+                <a16:creationId xmlns:a16="http://schemas.microsoft.com/office/drawing/2014/main" id="{6809F009-203E-4FFE-B7F2-DD78E6F02A0E}"/>
               </a:ext>
             </a:extLst>
           </p:cNvPr>
@@ -4026,7 +4026,7 @@
           <p:cNvPr id="16" name="">
             <a:extLst xmlns:a="http://schemas.openxmlformats.org/drawingml/2006/main">
               <a:ext uri="{FF2B5EF4-FFF2-40B4-BE49-F238E27FC236}">
-                <a16:creationId xmlns:a16="http://schemas.microsoft.com/office/drawing/2014/main" id="{0CE4938F-FF34-4998-AE85-0B14BCBFF33B}"/>
+                <a16:creationId xmlns:a16="http://schemas.microsoft.com/office/drawing/2014/main" id="{73D9FF73-E8D5-45E0-B17B-074A560BDFAF}"/>
               </a:ext>
             </a:extLst>
           </p:cNvPr>
@@ -4083,7 +4083,7 @@
           <p:cNvPr id="17" name="">
             <a:extLst xmlns:a="http://schemas.openxmlformats.org/drawingml/2006/main">
               <a:ext uri="{FF2B5EF4-FFF2-40B4-BE49-F238E27FC236}">
-                <a16:creationId xmlns:a16="http://schemas.microsoft.com/office/drawing/2014/main" id="{C003EAA3-D745-403E-BEFE-B43384ACA496}"/>
+                <a16:creationId xmlns:a16="http://schemas.microsoft.com/office/drawing/2014/main" id="{71C53CEF-63B7-4C73-A2B3-4BCF39C694A0}"/>
               </a:ext>
             </a:extLst>
           </p:cNvPr>
@@ -4140,7 +4140,7 @@
           <p:cNvPr id="18" name="">
             <a:extLst xmlns:a="http://schemas.openxmlformats.org/drawingml/2006/main">
               <a:ext uri="{FF2B5EF4-FFF2-40B4-BE49-F238E27FC236}">
-                <a16:creationId xmlns:a16="http://schemas.microsoft.com/office/drawing/2014/main" id="{5F7A0EBF-079F-4E36-817C-F61E55CFB69D}"/>
+                <a16:creationId xmlns:a16="http://schemas.microsoft.com/office/drawing/2014/main" id="{E35E3BF8-E663-479A-AD02-F5E5E703A968}"/>
               </a:ext>
             </a:extLst>
           </p:cNvPr>
@@ -4195,7 +4195,7 @@
     </p:spTree>
     <p:extLst>
       <p:ext uri="{BB962C8B-B14F-4D97-AF65-F5344CB8AC3E}">
-        <p14:creationId xmlns:p14="http://schemas.microsoft.com/office/powerpoint/2010/main" val="545439882"/>
+        <p14:creationId xmlns:p14="http://schemas.microsoft.com/office/powerpoint/2010/main" val="1753702993"/>
       </p:ext>
     </p:extLst>
   </p:cSld>
@@ -4350,7 +4350,7 @@
           <p:cNvPr id="23" name="">
             <a:extLst xmlns:a="http://schemas.openxmlformats.org/drawingml/2006/main">
               <a:ext uri="{FF2B5EF4-FFF2-40B4-BE49-F238E27FC236}">
-                <a16:creationId xmlns:a16="http://schemas.microsoft.com/office/drawing/2014/main" id="{DB84F654-A5D0-436E-9464-B5CFD0A70DC3}"/>
+                <a16:creationId xmlns:a16="http://schemas.microsoft.com/office/drawing/2014/main" id="{AAC90F84-BA1C-451B-9838-78DE3ED63C9B}"/>
               </a:ext>
             </a:extLst>
           </p:cNvPr>
@@ -4382,7 +4382,7 @@
           <p:cNvPr id="2" name="">
             <a:extLst xmlns:a="http://schemas.openxmlformats.org/drawingml/2006/main">
               <a:ext uri="{FF2B5EF4-FFF2-40B4-BE49-F238E27FC236}">
-                <a16:creationId xmlns:a16="http://schemas.microsoft.com/office/drawing/2014/main" id="{A350AC36-CFBD-4BED-831D-312F3105C1DC}"/>
+                <a16:creationId xmlns:a16="http://schemas.microsoft.com/office/drawing/2014/main" id="{16131CA3-E36C-4A8A-9AA7-3C1C7405EEE4}"/>
               </a:ext>
             </a:extLst>
           </p:cNvPr>
@@ -4439,7 +4439,7 @@
           <p:cNvPr id="3" name="">
             <a:extLst xmlns:a="http://schemas.openxmlformats.org/drawingml/2006/main">
               <a:ext uri="{FF2B5EF4-FFF2-40B4-BE49-F238E27FC236}">
-                <a16:creationId xmlns:a16="http://schemas.microsoft.com/office/drawing/2014/main" id="{2D3BF10A-724C-4362-B0A7-D115391E1664}"/>
+                <a16:creationId xmlns:a16="http://schemas.microsoft.com/office/drawing/2014/main" id="{164EEBA6-E47E-4BBE-808D-4EB55FD3A067}"/>
               </a:ext>
             </a:extLst>
           </p:cNvPr>
@@ -4471,7 +4471,7 @@
           <p:cNvPr id="4" name="">
             <a:extLst xmlns:a="http://schemas.openxmlformats.org/drawingml/2006/main">
               <a:ext uri="{FF2B5EF4-FFF2-40B4-BE49-F238E27FC236}">
-                <a16:creationId xmlns:a16="http://schemas.microsoft.com/office/drawing/2014/main" id="{8452C7E6-E479-4E72-A911-959D8161AB1E}"/>
+                <a16:creationId xmlns:a16="http://schemas.microsoft.com/office/drawing/2014/main" id="{5E4D1DE3-515B-412C-A9AB-FB469A28E408}"/>
               </a:ext>
             </a:extLst>
           </p:cNvPr>
@@ -4528,7 +4528,7 @@
           <p:cNvPr id="5" name="">
             <a:extLst xmlns:a="http://schemas.openxmlformats.org/drawingml/2006/main">
               <a:ext uri="{FF2B5EF4-FFF2-40B4-BE49-F238E27FC236}">
-                <a16:creationId xmlns:a16="http://schemas.microsoft.com/office/drawing/2014/main" id="{582492C1-6B88-4F51-ADC6-5A9FDE71159D}"/>
+                <a16:creationId xmlns:a16="http://schemas.microsoft.com/office/drawing/2014/main" id="{033DC6A4-D818-49EE-BEA7-768F466D3191}"/>
               </a:ext>
             </a:extLst>
           </p:cNvPr>
@@ -4585,7 +4585,7 @@
           <p:cNvPr id="6" name="">
             <a:extLst xmlns:a="http://schemas.openxmlformats.org/drawingml/2006/main">
               <a:ext uri="{FF2B5EF4-FFF2-40B4-BE49-F238E27FC236}">
-                <a16:creationId xmlns:a16="http://schemas.microsoft.com/office/drawing/2014/main" id="{C33A83BC-D50E-4E48-9B7D-91389B35F43D}"/>
+                <a16:creationId xmlns:a16="http://schemas.microsoft.com/office/drawing/2014/main" id="{201DDE97-E9FD-4C13-AC2C-4CA9B9B11A48}"/>
               </a:ext>
             </a:extLst>
           </p:cNvPr>
@@ -4642,7 +4642,7 @@
           <p:cNvPr id="7" name="">
             <a:extLst xmlns:a="http://schemas.openxmlformats.org/drawingml/2006/main">
               <a:ext uri="{FF2B5EF4-FFF2-40B4-BE49-F238E27FC236}">
-                <a16:creationId xmlns:a16="http://schemas.microsoft.com/office/drawing/2014/main" id="{4C714F25-DD5D-4F33-B4C7-6BC1DD359131}"/>
+                <a16:creationId xmlns:a16="http://schemas.microsoft.com/office/drawing/2014/main" id="{11B70AF0-6671-4361-8C6A-3F66A1A32D1C}"/>
               </a:ext>
             </a:extLst>
           </p:cNvPr>
@@ -4674,7 +4674,7 @@
           <p:cNvPr id="8" name="">
             <a:extLst xmlns:a="http://schemas.openxmlformats.org/drawingml/2006/main">
               <a:ext uri="{FF2B5EF4-FFF2-40B4-BE49-F238E27FC236}">
-                <a16:creationId xmlns:a16="http://schemas.microsoft.com/office/drawing/2014/main" id="{760C934E-68E2-446E-9496-982E60ECE68D}"/>
+                <a16:creationId xmlns:a16="http://schemas.microsoft.com/office/drawing/2014/main" id="{11972864-A815-4E45-A87D-DA331A191F24}"/>
               </a:ext>
             </a:extLst>
           </p:cNvPr>
@@ -4731,7 +4731,7 @@
           <p:cNvPr id="9" name="">
             <a:extLst xmlns:a="http://schemas.openxmlformats.org/drawingml/2006/main">
               <a:ext uri="{FF2B5EF4-FFF2-40B4-BE49-F238E27FC236}">
-                <a16:creationId xmlns:a16="http://schemas.microsoft.com/office/drawing/2014/main" id="{B9E1FBE3-8027-4FF9-A32C-4EF1652CC232}"/>
+                <a16:creationId xmlns:a16="http://schemas.microsoft.com/office/drawing/2014/main" id="{0FEC8BFC-CD1C-4731-9380-CE027AC86B89}"/>
               </a:ext>
             </a:extLst>
           </p:cNvPr>
@@ -4788,7 +4788,7 @@
           <p:cNvPr id="10" name="">
             <a:extLst xmlns:a="http://schemas.openxmlformats.org/drawingml/2006/main">
               <a:ext uri="{FF2B5EF4-FFF2-40B4-BE49-F238E27FC236}">
-                <a16:creationId xmlns:a16="http://schemas.microsoft.com/office/drawing/2014/main" id="{E58590C5-E671-4E69-B82B-403767AF448A}"/>
+                <a16:creationId xmlns:a16="http://schemas.microsoft.com/office/drawing/2014/main" id="{DCEB8B2C-7BAB-4C87-8216-BFF57EC251EF}"/>
               </a:ext>
             </a:extLst>
           </p:cNvPr>
@@ -4822,7 +4822,7 @@
           <p:cNvPr id="11" name="">
             <a:extLst xmlns:a="http://schemas.openxmlformats.org/drawingml/2006/main">
               <a:ext uri="{FF2B5EF4-FFF2-40B4-BE49-F238E27FC236}">
-                <a16:creationId xmlns:a16="http://schemas.microsoft.com/office/drawing/2014/main" id="{23F7F03E-0D5D-41A8-B717-4260E07532E6}"/>
+                <a16:creationId xmlns:a16="http://schemas.microsoft.com/office/drawing/2014/main" id="{2282C461-C12E-4D99-BCE2-C73E0772EC26}"/>
               </a:ext>
             </a:extLst>
           </p:cNvPr>
@@ -4854,7 +4854,7 @@
           <p:cNvPr id="12" name="">
             <a:extLst xmlns:a="http://schemas.openxmlformats.org/drawingml/2006/main">
               <a:ext uri="{FF2B5EF4-FFF2-40B4-BE49-F238E27FC236}">
-                <a16:creationId xmlns:a16="http://schemas.microsoft.com/office/drawing/2014/main" id="{EACA8090-D4E1-466C-BB10-FFFFD87ADD67}"/>
+                <a16:creationId xmlns:a16="http://schemas.microsoft.com/office/drawing/2014/main" id="{8B8EB94F-9757-4566-B70E-1A2983728D2C}"/>
               </a:ext>
             </a:extLst>
           </p:cNvPr>
@@ -4911,7 +4911,7 @@
           <p:cNvPr id="13" name="">
             <a:extLst xmlns:a="http://schemas.openxmlformats.org/drawingml/2006/main">
               <a:ext uri="{FF2B5EF4-FFF2-40B4-BE49-F238E27FC236}">
-                <a16:creationId xmlns:a16="http://schemas.microsoft.com/office/drawing/2014/main" id="{829DDEEE-D61D-4D49-B6B5-BA698F509968}"/>
+                <a16:creationId xmlns:a16="http://schemas.microsoft.com/office/drawing/2014/main" id="{E858EAE1-C550-4A07-9D35-B8B7213B19F4}"/>
               </a:ext>
             </a:extLst>
           </p:cNvPr>
@@ -4968,7 +4968,7 @@
           <p:cNvPr id="14" name="">
             <a:extLst xmlns:a="http://schemas.openxmlformats.org/drawingml/2006/main">
               <a:ext uri="{FF2B5EF4-FFF2-40B4-BE49-F238E27FC236}">
-                <a16:creationId xmlns:a16="http://schemas.microsoft.com/office/drawing/2014/main" id="{70F2FAFD-3CCA-4F38-AA2F-6220C5CDA726}"/>
+                <a16:creationId xmlns:a16="http://schemas.microsoft.com/office/drawing/2014/main" id="{2CD3EF4C-819D-4329-8659-25CCF6A624B8}"/>
               </a:ext>
             </a:extLst>
           </p:cNvPr>
@@ -5002,7 +5002,7 @@
           <p:cNvPr id="15" name="">
             <a:extLst xmlns:a="http://schemas.openxmlformats.org/drawingml/2006/main">
               <a:ext uri="{FF2B5EF4-FFF2-40B4-BE49-F238E27FC236}">
-                <a16:creationId xmlns:a16="http://schemas.microsoft.com/office/drawing/2014/main" id="{9C572F75-9E8A-41F1-B658-7E7E6736F737}"/>
+                <a16:creationId xmlns:a16="http://schemas.microsoft.com/office/drawing/2014/main" id="{0019AD45-0C8D-4D34-9909-3A42F8FE14A4}"/>
               </a:ext>
             </a:extLst>
           </p:cNvPr>
@@ -5034,7 +5034,7 @@
           <p:cNvPr id="16" name="">
             <a:extLst xmlns:a="http://schemas.openxmlformats.org/drawingml/2006/main">
               <a:ext uri="{FF2B5EF4-FFF2-40B4-BE49-F238E27FC236}">
-                <a16:creationId xmlns:a16="http://schemas.microsoft.com/office/drawing/2014/main" id="{4D317567-53EC-4D93-BD36-F6DDC07EA6AE}"/>
+                <a16:creationId xmlns:a16="http://schemas.microsoft.com/office/drawing/2014/main" id="{B1BB5CCC-39F1-4AF3-A444-D7AE47B9B0B2}"/>
               </a:ext>
             </a:extLst>
           </p:cNvPr>
@@ -5091,7 +5091,7 @@
           <p:cNvPr id="17" name="">
             <a:extLst xmlns:a="http://schemas.openxmlformats.org/drawingml/2006/main">
               <a:ext uri="{FF2B5EF4-FFF2-40B4-BE49-F238E27FC236}">
-                <a16:creationId xmlns:a16="http://schemas.microsoft.com/office/drawing/2014/main" id="{380AC5BC-2621-4EFA-A1F9-62D3DE0AB437}"/>
+                <a16:creationId xmlns:a16="http://schemas.microsoft.com/office/drawing/2014/main" id="{3AA552F3-A95C-4920-B323-E59F25D33188}"/>
               </a:ext>
             </a:extLst>
           </p:cNvPr>
@@ -5148,7 +5148,7 @@
           <p:cNvPr id="18" name="">
             <a:extLst xmlns:a="http://schemas.openxmlformats.org/drawingml/2006/main">
               <a:ext uri="{FF2B5EF4-FFF2-40B4-BE49-F238E27FC236}">
-                <a16:creationId xmlns:a16="http://schemas.microsoft.com/office/drawing/2014/main" id="{C4F9A859-E2FE-468A-9DD2-FFAEFABB52A0}"/>
+                <a16:creationId xmlns:a16="http://schemas.microsoft.com/office/drawing/2014/main" id="{87747E4F-38EE-4A01-AA39-537D14D39C63}"/>
               </a:ext>
             </a:extLst>
           </p:cNvPr>
@@ -5182,7 +5182,7 @@
           <p:cNvPr id="19" name="">
             <a:extLst xmlns:a="http://schemas.openxmlformats.org/drawingml/2006/main">
               <a:ext uri="{FF2B5EF4-FFF2-40B4-BE49-F238E27FC236}">
-                <a16:creationId xmlns:a16="http://schemas.microsoft.com/office/drawing/2014/main" id="{E10E0A77-39C8-45EA-91A0-DAFA047E2196}"/>
+                <a16:creationId xmlns:a16="http://schemas.microsoft.com/office/drawing/2014/main" id="{F3C70572-D0DD-4C9D-A131-D05A0B2AA7BC}"/>
               </a:ext>
             </a:extLst>
           </p:cNvPr>
@@ -5214,7 +5214,7 @@
           <p:cNvPr id="20" name="">
             <a:extLst xmlns:a="http://schemas.openxmlformats.org/drawingml/2006/main">
               <a:ext uri="{FF2B5EF4-FFF2-40B4-BE49-F238E27FC236}">
-                <a16:creationId xmlns:a16="http://schemas.microsoft.com/office/drawing/2014/main" id="{A687380B-D46B-4B7B-8A87-2FC6C378D673}"/>
+                <a16:creationId xmlns:a16="http://schemas.microsoft.com/office/drawing/2014/main" id="{DAEEFD39-D1FB-446A-8DFE-2A56AEBD22C3}"/>
               </a:ext>
             </a:extLst>
           </p:cNvPr>
@@ -5271,7 +5271,7 @@
           <p:cNvPr id="21" name="">
             <a:extLst xmlns:a="http://schemas.openxmlformats.org/drawingml/2006/main">
               <a:ext uri="{FF2B5EF4-FFF2-40B4-BE49-F238E27FC236}">
-                <a16:creationId xmlns:a16="http://schemas.microsoft.com/office/drawing/2014/main" id="{28E680E9-04D3-4F7B-AA4A-1EF4ADBEC082}"/>
+                <a16:creationId xmlns:a16="http://schemas.microsoft.com/office/drawing/2014/main" id="{E8EAC44A-7D80-4538-908C-E8A8ECFCDCA4}"/>
               </a:ext>
             </a:extLst>
           </p:cNvPr>
@@ -5328,7 +5328,7 @@
           <p:cNvPr id="22" name="">
             <a:extLst xmlns:a="http://schemas.openxmlformats.org/drawingml/2006/main">
               <a:ext uri="{FF2B5EF4-FFF2-40B4-BE49-F238E27FC236}">
-                <a16:creationId xmlns:a16="http://schemas.microsoft.com/office/drawing/2014/main" id="{83E55049-F56B-46F8-87F1-3D9625A1403C}"/>
+                <a16:creationId xmlns:a16="http://schemas.microsoft.com/office/drawing/2014/main" id="{9CB0FA95-8120-4C8D-AE25-BA71EECE94B9}"/>
               </a:ext>
             </a:extLst>
           </p:cNvPr>
@@ -5383,7 +5383,7 @@
     </p:spTree>
     <p:extLst>
       <p:ext uri="{BB962C8B-B14F-4D97-AF65-F5344CB8AC3E}">
-        <p14:creationId xmlns:p14="http://schemas.microsoft.com/office/powerpoint/2010/main" val="95394353"/>
+        <p14:creationId xmlns:p14="http://schemas.microsoft.com/office/powerpoint/2010/main" val="618862332"/>
       </p:ext>
     </p:extLst>
   </p:cSld>
@@ -5584,7 +5584,7 @@
           <p:cNvPr id="23" name="">
             <a:extLst xmlns:a="http://schemas.openxmlformats.org/drawingml/2006/main">
               <a:ext uri="{FF2B5EF4-FFF2-40B4-BE49-F238E27FC236}">
-                <a16:creationId xmlns:a16="http://schemas.microsoft.com/office/drawing/2014/main" id="{C868064E-CE0A-4F71-8A98-B612F05F38FF}"/>
+                <a16:creationId xmlns:a16="http://schemas.microsoft.com/office/drawing/2014/main" id="{C2103B63-3DFB-4E5A-A86D-7856A34AC281}"/>
               </a:ext>
             </a:extLst>
           </p:cNvPr>
@@ -5616,7 +5616,7 @@
           <p:cNvPr id="2" name="">
             <a:extLst xmlns:a="http://schemas.openxmlformats.org/drawingml/2006/main">
               <a:ext uri="{FF2B5EF4-FFF2-40B4-BE49-F238E27FC236}">
-                <a16:creationId xmlns:a16="http://schemas.microsoft.com/office/drawing/2014/main" id="{4C86C967-E44C-40AD-A950-CDAEEB6489AF}"/>
+                <a16:creationId xmlns:a16="http://schemas.microsoft.com/office/drawing/2014/main" id="{BF9496E3-B516-4C3F-9F9A-33104A339EDF}"/>
               </a:ext>
             </a:extLst>
           </p:cNvPr>
@@ -5673,7 +5673,7 @@
           <p:cNvPr id="3" name="">
             <a:extLst xmlns:a="http://schemas.openxmlformats.org/drawingml/2006/main">
               <a:ext uri="{FF2B5EF4-FFF2-40B4-BE49-F238E27FC236}">
-                <a16:creationId xmlns:a16="http://schemas.microsoft.com/office/drawing/2014/main" id="{CF9DC159-672B-4751-9F08-86E8DF27AF96}"/>
+                <a16:creationId xmlns:a16="http://schemas.microsoft.com/office/drawing/2014/main" id="{0CA227D7-E39A-43B0-9066-DC1BFD6A191A}"/>
               </a:ext>
             </a:extLst>
           </p:cNvPr>
@@ -5705,7 +5705,7 @@
           <p:cNvPr id="4" name="">
             <a:extLst xmlns:a="http://schemas.openxmlformats.org/drawingml/2006/main">
               <a:ext uri="{FF2B5EF4-FFF2-40B4-BE49-F238E27FC236}">
-                <a16:creationId xmlns:a16="http://schemas.microsoft.com/office/drawing/2014/main" id="{C11237F8-2300-4DF5-B917-EC12F35407E2}"/>
+                <a16:creationId xmlns:a16="http://schemas.microsoft.com/office/drawing/2014/main" id="{116AE1E1-4505-407C-B475-00E28BDA8A90}"/>
               </a:ext>
             </a:extLst>
           </p:cNvPr>
@@ -5762,7 +5762,7 @@
           <p:cNvPr id="5" name="">
             <a:extLst xmlns:a="http://schemas.openxmlformats.org/drawingml/2006/main">
               <a:ext uri="{FF2B5EF4-FFF2-40B4-BE49-F238E27FC236}">
-                <a16:creationId xmlns:a16="http://schemas.microsoft.com/office/drawing/2014/main" id="{41796D4C-5749-48C2-9B3A-CFAC0549550B}"/>
+                <a16:creationId xmlns:a16="http://schemas.microsoft.com/office/drawing/2014/main" id="{065A7F62-3E4D-4B6A-9703-7CFA25E2C4E9}"/>
               </a:ext>
             </a:extLst>
           </p:cNvPr>
@@ -5819,7 +5819,7 @@
           <p:cNvPr id="6" name="">
             <a:extLst xmlns:a="http://schemas.openxmlformats.org/drawingml/2006/main">
               <a:ext uri="{FF2B5EF4-FFF2-40B4-BE49-F238E27FC236}">
-                <a16:creationId xmlns:a16="http://schemas.microsoft.com/office/drawing/2014/main" id="{7B746FCA-2768-4904-ACC0-EEF62CF255CC}"/>
+                <a16:creationId xmlns:a16="http://schemas.microsoft.com/office/drawing/2014/main" id="{0A44C767-7FCD-4564-ADB5-1E77F527F637}"/>
               </a:ext>
             </a:extLst>
           </p:cNvPr>
@@ -5876,7 +5876,7 @@
           <p:cNvPr id="7" name="">
             <a:extLst xmlns:a="http://schemas.openxmlformats.org/drawingml/2006/main">
               <a:ext uri="{FF2B5EF4-FFF2-40B4-BE49-F238E27FC236}">
-                <a16:creationId xmlns:a16="http://schemas.microsoft.com/office/drawing/2014/main" id="{46AE446B-04A7-45C3-B088-3FDBB1EA8CCC}"/>
+                <a16:creationId xmlns:a16="http://schemas.microsoft.com/office/drawing/2014/main" id="{AC88A596-A76F-4805-ADCA-9DD3AA521964}"/>
               </a:ext>
             </a:extLst>
           </p:cNvPr>
@@ -5908,7 +5908,7 @@
           <p:cNvPr id="8" name="">
             <a:extLst xmlns:a="http://schemas.openxmlformats.org/drawingml/2006/main">
               <a:ext uri="{FF2B5EF4-FFF2-40B4-BE49-F238E27FC236}">
-                <a16:creationId xmlns:a16="http://schemas.microsoft.com/office/drawing/2014/main" id="{0D9FB7F7-370A-4694-8DB3-88C654E3C538}"/>
+                <a16:creationId xmlns:a16="http://schemas.microsoft.com/office/drawing/2014/main" id="{1BA29386-A4AD-42AD-8617-A8FE7A6A27BF}"/>
               </a:ext>
             </a:extLst>
           </p:cNvPr>
@@ -5965,7 +5965,7 @@
           <p:cNvPr id="9" name="">
             <a:extLst xmlns:a="http://schemas.openxmlformats.org/drawingml/2006/main">
               <a:ext uri="{FF2B5EF4-FFF2-40B4-BE49-F238E27FC236}">
-                <a16:creationId xmlns:a16="http://schemas.microsoft.com/office/drawing/2014/main" id="{D193F307-2BF3-4CD3-8EA0-8CA56A56DEAC}"/>
+                <a16:creationId xmlns:a16="http://schemas.microsoft.com/office/drawing/2014/main" id="{8144FBE4-2408-4A18-978D-18F9A4AF0FCF}"/>
               </a:ext>
             </a:extLst>
           </p:cNvPr>
@@ -6022,7 +6022,7 @@
           <p:cNvPr id="10" name="">
             <a:extLst xmlns:a="http://schemas.openxmlformats.org/drawingml/2006/main">
               <a:ext uri="{FF2B5EF4-FFF2-40B4-BE49-F238E27FC236}">
-                <a16:creationId xmlns:a16="http://schemas.microsoft.com/office/drawing/2014/main" id="{DCF533C4-E60C-477D-8267-A3ACA7E970B3}"/>
+                <a16:creationId xmlns:a16="http://schemas.microsoft.com/office/drawing/2014/main" id="{26251EF8-F4FD-492C-B041-E8ABB6BB57E1}"/>
               </a:ext>
             </a:extLst>
           </p:cNvPr>
@@ -6056,7 +6056,7 @@
           <p:cNvPr id="11" name="">
             <a:extLst xmlns:a="http://schemas.openxmlformats.org/drawingml/2006/main">
               <a:ext uri="{FF2B5EF4-FFF2-40B4-BE49-F238E27FC236}">
-                <a16:creationId xmlns:a16="http://schemas.microsoft.com/office/drawing/2014/main" id="{01476F76-A0B0-4BF2-8E5E-33167E018645}"/>
+                <a16:creationId xmlns:a16="http://schemas.microsoft.com/office/drawing/2014/main" id="{08AB5D09-E84B-440E-B91A-6B0C2DE21ED8}"/>
               </a:ext>
             </a:extLst>
           </p:cNvPr>
@@ -6088,7 +6088,7 @@
           <p:cNvPr id="12" name="">
             <a:extLst xmlns:a="http://schemas.openxmlformats.org/drawingml/2006/main">
               <a:ext uri="{FF2B5EF4-FFF2-40B4-BE49-F238E27FC236}">
-                <a16:creationId xmlns:a16="http://schemas.microsoft.com/office/drawing/2014/main" id="{92860611-9492-4D0E-B3EA-05279C67B4E1}"/>
+                <a16:creationId xmlns:a16="http://schemas.microsoft.com/office/drawing/2014/main" id="{86E6570B-AFFB-4E02-A07D-DCDF0F54EA50}"/>
               </a:ext>
             </a:extLst>
           </p:cNvPr>
@@ -6145,7 +6145,7 @@
           <p:cNvPr id="13" name="">
             <a:extLst xmlns:a="http://schemas.openxmlformats.org/drawingml/2006/main">
               <a:ext uri="{FF2B5EF4-FFF2-40B4-BE49-F238E27FC236}">
-                <a16:creationId xmlns:a16="http://schemas.microsoft.com/office/drawing/2014/main" id="{9E15C5C6-0E59-44A3-AE67-108C8CA19B4D}"/>
+                <a16:creationId xmlns:a16="http://schemas.microsoft.com/office/drawing/2014/main" id="{912B98CB-16D6-4AA3-8E5A-E19191EFE163}"/>
               </a:ext>
             </a:extLst>
           </p:cNvPr>
@@ -6202,7 +6202,7 @@
           <p:cNvPr id="14" name="">
             <a:extLst xmlns:a="http://schemas.openxmlformats.org/drawingml/2006/main">
               <a:ext uri="{FF2B5EF4-FFF2-40B4-BE49-F238E27FC236}">
-                <a16:creationId xmlns:a16="http://schemas.microsoft.com/office/drawing/2014/main" id="{FB56A71B-DECE-44E9-9AA9-3BA81A43520A}"/>
+                <a16:creationId xmlns:a16="http://schemas.microsoft.com/office/drawing/2014/main" id="{66C999A4-E4A3-42E2-BC68-42C63D159FA5}"/>
               </a:ext>
             </a:extLst>
           </p:cNvPr>
@@ -6236,7 +6236,7 @@
           <p:cNvPr id="15" name="">
             <a:extLst xmlns:a="http://schemas.openxmlformats.org/drawingml/2006/main">
               <a:ext uri="{FF2B5EF4-FFF2-40B4-BE49-F238E27FC236}">
-                <a16:creationId xmlns:a16="http://schemas.microsoft.com/office/drawing/2014/main" id="{134CFF21-840D-4CFA-8EF9-604080B4A2DC}"/>
+                <a16:creationId xmlns:a16="http://schemas.microsoft.com/office/drawing/2014/main" id="{93A89CFF-65F8-4886-8FC8-8C98DFA29F73}"/>
               </a:ext>
             </a:extLst>
           </p:cNvPr>
@@ -6268,7 +6268,7 @@
           <p:cNvPr id="16" name="">
             <a:extLst xmlns:a="http://schemas.openxmlformats.org/drawingml/2006/main">
               <a:ext uri="{FF2B5EF4-FFF2-40B4-BE49-F238E27FC236}">
-                <a16:creationId xmlns:a16="http://schemas.microsoft.com/office/drawing/2014/main" id="{FB3ED6A9-32F8-4A65-98BA-0C69274C3FF0}"/>
+                <a16:creationId xmlns:a16="http://schemas.microsoft.com/office/drawing/2014/main" id="{057E2AFE-0294-475B-A27D-EC13830818CA}"/>
               </a:ext>
             </a:extLst>
           </p:cNvPr>
@@ -6325,7 +6325,7 @@
           <p:cNvPr id="17" name="">
             <a:extLst xmlns:a="http://schemas.openxmlformats.org/drawingml/2006/main">
               <a:ext uri="{FF2B5EF4-FFF2-40B4-BE49-F238E27FC236}">
-                <a16:creationId xmlns:a16="http://schemas.microsoft.com/office/drawing/2014/main" id="{EE4E64B6-7CE5-429E-9E3B-B32AD204E02E}"/>
+                <a16:creationId xmlns:a16="http://schemas.microsoft.com/office/drawing/2014/main" id="{93D54880-957F-4902-88DD-C98132B3071A}"/>
               </a:ext>
             </a:extLst>
           </p:cNvPr>
@@ -6382,7 +6382,7 @@
           <p:cNvPr id="18" name="">
             <a:extLst xmlns:a="http://schemas.openxmlformats.org/drawingml/2006/main">
               <a:ext uri="{FF2B5EF4-FFF2-40B4-BE49-F238E27FC236}">
-                <a16:creationId xmlns:a16="http://schemas.microsoft.com/office/drawing/2014/main" id="{E64DE17D-9448-4BD6-B60C-392F6197792E}"/>
+                <a16:creationId xmlns:a16="http://schemas.microsoft.com/office/drawing/2014/main" id="{1FB5F31D-EDF9-4D84-A15E-C485DD2E5E51}"/>
               </a:ext>
             </a:extLst>
           </p:cNvPr>
@@ -6416,7 +6416,7 @@
           <p:cNvPr id="19" name="">
             <a:extLst xmlns:a="http://schemas.openxmlformats.org/drawingml/2006/main">
               <a:ext uri="{FF2B5EF4-FFF2-40B4-BE49-F238E27FC236}">
-                <a16:creationId xmlns:a16="http://schemas.microsoft.com/office/drawing/2014/main" id="{2DA012C4-1935-431C-BE63-657AEAF054A2}"/>
+                <a16:creationId xmlns:a16="http://schemas.microsoft.com/office/drawing/2014/main" id="{CFB45392-E5E1-4B46-AD7A-2049AE6EADDF}"/>
               </a:ext>
             </a:extLst>
           </p:cNvPr>
@@ -6448,7 +6448,7 @@
           <p:cNvPr id="20" name="">
             <a:extLst xmlns:a="http://schemas.openxmlformats.org/drawingml/2006/main">
               <a:ext uri="{FF2B5EF4-FFF2-40B4-BE49-F238E27FC236}">
-                <a16:creationId xmlns:a16="http://schemas.microsoft.com/office/drawing/2014/main" id="{15B51E30-5424-409B-8DD4-3B288DCCDE1B}"/>
+                <a16:creationId xmlns:a16="http://schemas.microsoft.com/office/drawing/2014/main" id="{F3DBBEB6-D08E-4E3D-9434-AAAF6F6A4C55}"/>
               </a:ext>
             </a:extLst>
           </p:cNvPr>
@@ -6505,7 +6505,7 @@
           <p:cNvPr id="21" name="">
             <a:extLst xmlns:a="http://schemas.openxmlformats.org/drawingml/2006/main">
               <a:ext uri="{FF2B5EF4-FFF2-40B4-BE49-F238E27FC236}">
-                <a16:creationId xmlns:a16="http://schemas.microsoft.com/office/drawing/2014/main" id="{0D5363EF-0DCC-437B-848E-B298DB721D3D}"/>
+                <a16:creationId xmlns:a16="http://schemas.microsoft.com/office/drawing/2014/main" id="{D7AE5086-014C-465F-BA88-0BF8991F25EE}"/>
               </a:ext>
             </a:extLst>
           </p:cNvPr>
@@ -6562,7 +6562,7 @@
           <p:cNvPr id="22" name="">
             <a:extLst xmlns:a="http://schemas.openxmlformats.org/drawingml/2006/main">
               <a:ext uri="{FF2B5EF4-FFF2-40B4-BE49-F238E27FC236}">
-                <a16:creationId xmlns:a16="http://schemas.microsoft.com/office/drawing/2014/main" id="{6CA215F1-D435-485A-A8AF-9E181E738F67}"/>
+                <a16:creationId xmlns:a16="http://schemas.microsoft.com/office/drawing/2014/main" id="{C6695782-8CCC-4E09-AA9F-B3F588A880AF}"/>
               </a:ext>
             </a:extLst>
           </p:cNvPr>
@@ -6617,7 +6617,7 @@
     </p:spTree>
     <p:extLst>
       <p:ext uri="{BB962C8B-B14F-4D97-AF65-F5344CB8AC3E}">
-        <p14:creationId xmlns:p14="http://schemas.microsoft.com/office/powerpoint/2010/main" val="1284280248"/>
+        <p14:creationId xmlns:p14="http://schemas.microsoft.com/office/powerpoint/2010/main" val="138644075"/>
       </p:ext>
     </p:extLst>
   </p:cSld>
@@ -6818,7 +6818,7 @@
           <p:cNvPr id="16" name="">
             <a:extLst xmlns:a="http://schemas.openxmlformats.org/drawingml/2006/main">
               <a:ext uri="{FF2B5EF4-FFF2-40B4-BE49-F238E27FC236}">
-                <a16:creationId xmlns:a16="http://schemas.microsoft.com/office/drawing/2014/main" id="{F012936D-9F37-478C-8F82-B15430917C4A}"/>
+                <a16:creationId xmlns:a16="http://schemas.microsoft.com/office/drawing/2014/main" id="{44A61B90-1FE7-4119-80FB-4C88BCD90FB5}"/>
               </a:ext>
             </a:extLst>
           </p:cNvPr>
@@ -6850,7 +6850,7 @@
           <p:cNvPr id="2" name="">
             <a:extLst xmlns:a="http://schemas.openxmlformats.org/drawingml/2006/main">
               <a:ext uri="{FF2B5EF4-FFF2-40B4-BE49-F238E27FC236}">
-                <a16:creationId xmlns:a16="http://schemas.microsoft.com/office/drawing/2014/main" id="{A97E5AED-BC3C-4B30-B4E8-5B732DF5A54D}"/>
+                <a16:creationId xmlns:a16="http://schemas.microsoft.com/office/drawing/2014/main" id="{8032D752-D60B-40F1-BDFB-8F8722F11116}"/>
               </a:ext>
             </a:extLst>
           </p:cNvPr>
@@ -6907,7 +6907,7 @@
           <p:cNvPr id="3" name="">
             <a:extLst xmlns:a="http://schemas.openxmlformats.org/drawingml/2006/main">
               <a:ext uri="{FF2B5EF4-FFF2-40B4-BE49-F238E27FC236}">
-                <a16:creationId xmlns:a16="http://schemas.microsoft.com/office/drawing/2014/main" id="{5D2FB196-85A6-4C57-B0EC-665FFA2F69FE}"/>
+                <a16:creationId xmlns:a16="http://schemas.microsoft.com/office/drawing/2014/main" id="{8ECD0638-4A69-43C4-9DF5-35EC4A320934}"/>
               </a:ext>
             </a:extLst>
           </p:cNvPr>
@@ -6939,7 +6939,7 @@
           <p:cNvPr id="4" name="">
             <a:extLst xmlns:a="http://schemas.openxmlformats.org/drawingml/2006/main">
               <a:ext uri="{FF2B5EF4-FFF2-40B4-BE49-F238E27FC236}">
-                <a16:creationId xmlns:a16="http://schemas.microsoft.com/office/drawing/2014/main" id="{0CE4A04D-C8F6-4EBF-BC3E-803DF51174C0}"/>
+                <a16:creationId xmlns:a16="http://schemas.microsoft.com/office/drawing/2014/main" id="{40719DEB-6396-4948-AE57-9898DCEC4A01}"/>
               </a:ext>
             </a:extLst>
           </p:cNvPr>
@@ -6996,7 +6996,7 @@
           <p:cNvPr id="5" name="">
             <a:extLst xmlns:a="http://schemas.openxmlformats.org/drawingml/2006/main">
               <a:ext uri="{FF2B5EF4-FFF2-40B4-BE49-F238E27FC236}">
-                <a16:creationId xmlns:a16="http://schemas.microsoft.com/office/drawing/2014/main" id="{B08D8A18-611C-4AF7-89D6-00E25A953090}"/>
+                <a16:creationId xmlns:a16="http://schemas.microsoft.com/office/drawing/2014/main" id="{887707D5-73A0-4D34-8F42-588E4CDFA24B}"/>
               </a:ext>
             </a:extLst>
           </p:cNvPr>
@@ -7053,7 +7053,7 @@
           <p:cNvPr id="6" name="">
             <a:extLst xmlns:a="http://schemas.openxmlformats.org/drawingml/2006/main">
               <a:ext uri="{FF2B5EF4-FFF2-40B4-BE49-F238E27FC236}">
-                <a16:creationId xmlns:a16="http://schemas.microsoft.com/office/drawing/2014/main" id="{C3B9FD79-F3A3-4E38-AFFC-28FA6D369395}"/>
+                <a16:creationId xmlns:a16="http://schemas.microsoft.com/office/drawing/2014/main" id="{CE65A0AC-823B-44D0-8AD6-2EA4DC512DDE}"/>
               </a:ext>
             </a:extLst>
           </p:cNvPr>
@@ -7110,7 +7110,7 @@
           <p:cNvPr id="7" name="">
             <a:extLst xmlns:a="http://schemas.openxmlformats.org/drawingml/2006/main">
               <a:ext uri="{FF2B5EF4-FFF2-40B4-BE49-F238E27FC236}">
-                <a16:creationId xmlns:a16="http://schemas.microsoft.com/office/drawing/2014/main" id="{DA951FC9-9EBA-4BD4-8BA8-8ADC41E7DF9E}"/>
+                <a16:creationId xmlns:a16="http://schemas.microsoft.com/office/drawing/2014/main" id="{FA5739C7-48E1-43FC-9962-C893ABA4C96C}"/>
               </a:ext>
             </a:extLst>
           </p:cNvPr>
@@ -7142,7 +7142,7 @@
           <p:cNvPr id="8" name="">
             <a:extLst xmlns:a="http://schemas.openxmlformats.org/drawingml/2006/main">
               <a:ext uri="{FF2B5EF4-FFF2-40B4-BE49-F238E27FC236}">
-                <a16:creationId xmlns:a16="http://schemas.microsoft.com/office/drawing/2014/main" id="{A5FC118E-DF69-44DA-B1A5-446B519F148B}"/>
+                <a16:creationId xmlns:a16="http://schemas.microsoft.com/office/drawing/2014/main" id="{F94DEC91-E096-406B-9471-064CB0CECC93}"/>
               </a:ext>
             </a:extLst>
           </p:cNvPr>
@@ -7199,7 +7199,7 @@
           <p:cNvPr id="9" name="">
             <a:extLst xmlns:a="http://schemas.openxmlformats.org/drawingml/2006/main">
               <a:ext uri="{FF2B5EF4-FFF2-40B4-BE49-F238E27FC236}">
-                <a16:creationId xmlns:a16="http://schemas.microsoft.com/office/drawing/2014/main" id="{A09968FD-3058-464C-9D60-B816F3405D5C}"/>
+                <a16:creationId xmlns:a16="http://schemas.microsoft.com/office/drawing/2014/main" id="{3AAC9F97-3468-4023-BBF0-FCE73BC4F910}"/>
               </a:ext>
             </a:extLst>
           </p:cNvPr>
@@ -7256,7 +7256,7 @@
           <p:cNvPr id="10" name="">
             <a:extLst xmlns:a="http://schemas.openxmlformats.org/drawingml/2006/main">
               <a:ext uri="{FF2B5EF4-FFF2-40B4-BE49-F238E27FC236}">
-                <a16:creationId xmlns:a16="http://schemas.microsoft.com/office/drawing/2014/main" id="{823CB1BA-4E2B-41CE-93F5-12EFD08454F9}"/>
+                <a16:creationId xmlns:a16="http://schemas.microsoft.com/office/drawing/2014/main" id="{B60AFAE2-0865-4C04-BE48-48CF65102096}"/>
               </a:ext>
             </a:extLst>
           </p:cNvPr>
@@ -7313,7 +7313,7 @@
           <p:cNvPr id="11" name="">
             <a:extLst xmlns:a="http://schemas.openxmlformats.org/drawingml/2006/main">
               <a:ext uri="{FF2B5EF4-FFF2-40B4-BE49-F238E27FC236}">
-                <a16:creationId xmlns:a16="http://schemas.microsoft.com/office/drawing/2014/main" id="{FB5FCDF2-C624-4B9B-B466-58198D3D09F6}"/>
+                <a16:creationId xmlns:a16="http://schemas.microsoft.com/office/drawing/2014/main" id="{615B2F68-136B-41A9-9003-3A09AFD1B6BE}"/>
               </a:ext>
             </a:extLst>
           </p:cNvPr>
@@ -7345,7 +7345,7 @@
           <p:cNvPr id="12" name="">
             <a:extLst xmlns:a="http://schemas.openxmlformats.org/drawingml/2006/main">
               <a:ext uri="{FF2B5EF4-FFF2-40B4-BE49-F238E27FC236}">
-                <a16:creationId xmlns:a16="http://schemas.microsoft.com/office/drawing/2014/main" id="{0B0B2669-415A-4009-AD5D-1FCADA17E7E3}"/>
+                <a16:creationId xmlns:a16="http://schemas.microsoft.com/office/drawing/2014/main" id="{6A88CC81-501F-4765-B0C9-5124222B5E47}"/>
               </a:ext>
             </a:extLst>
           </p:cNvPr>
@@ -7402,7 +7402,7 @@
           <p:cNvPr id="13" name="">
             <a:extLst xmlns:a="http://schemas.openxmlformats.org/drawingml/2006/main">
               <a:ext uri="{FF2B5EF4-FFF2-40B4-BE49-F238E27FC236}">
-                <a16:creationId xmlns:a16="http://schemas.microsoft.com/office/drawing/2014/main" id="{63866E3D-B094-4D0E-99B1-309DF01CA9D7}"/>
+                <a16:creationId xmlns:a16="http://schemas.microsoft.com/office/drawing/2014/main" id="{4136DB01-68BE-4703-99D7-2B89C3DD9D71}"/>
               </a:ext>
             </a:extLst>
           </p:cNvPr>
@@ -7459,7 +7459,7 @@
           <p:cNvPr id="14" name="">
             <a:extLst xmlns:a="http://schemas.openxmlformats.org/drawingml/2006/main">
               <a:ext uri="{FF2B5EF4-FFF2-40B4-BE49-F238E27FC236}">
-                <a16:creationId xmlns:a16="http://schemas.microsoft.com/office/drawing/2014/main" id="{8551E820-7129-465B-88D1-C549399BBC6A}"/>
+                <a16:creationId xmlns:a16="http://schemas.microsoft.com/office/drawing/2014/main" id="{E4126387-FF3C-4698-873A-7E2A3FC829F0}"/>
               </a:ext>
             </a:extLst>
           </p:cNvPr>
@@ -7516,7 +7516,7 @@
           <p:cNvPr id="15" name="">
             <a:extLst xmlns:a="http://schemas.openxmlformats.org/drawingml/2006/main">
               <a:ext uri="{FF2B5EF4-FFF2-40B4-BE49-F238E27FC236}">
-                <a16:creationId xmlns:a16="http://schemas.microsoft.com/office/drawing/2014/main" id="{7F9201E0-F241-4CD2-A218-53B774B519D3}"/>
+                <a16:creationId xmlns:a16="http://schemas.microsoft.com/office/drawing/2014/main" id="{BAE05E74-7726-4BF5-B9F6-1B6E0E98E086}"/>
               </a:ext>
             </a:extLst>
           </p:cNvPr>
@@ -7571,7 +7571,7 @@
     </p:spTree>
     <p:extLst>
       <p:ext uri="{BB962C8B-B14F-4D97-AF65-F5344CB8AC3E}">
-        <p14:creationId xmlns:p14="http://schemas.microsoft.com/office/powerpoint/2010/main" val="2020677918"/>
+        <p14:creationId xmlns:p14="http://schemas.microsoft.com/office/powerpoint/2010/main" val="710166161"/>
       </p:ext>
     </p:extLst>
   </p:cSld>
@@ -7772,7 +7772,7 @@
           <p:cNvPr id="23" name="">
             <a:extLst xmlns:a="http://schemas.openxmlformats.org/drawingml/2006/main">
               <a:ext uri="{FF2B5EF4-FFF2-40B4-BE49-F238E27FC236}">
-                <a16:creationId xmlns:a16="http://schemas.microsoft.com/office/drawing/2014/main" id="{F2833847-814D-444A-8F47-263E6804F61E}"/>
+                <a16:creationId xmlns:a16="http://schemas.microsoft.com/office/drawing/2014/main" id="{6D860F10-D7F6-493C-ABA9-EFBBC1937D5C}"/>
               </a:ext>
             </a:extLst>
           </p:cNvPr>
@@ -7804,7 +7804,7 @@
           <p:cNvPr id="2" name="">
             <a:extLst xmlns:a="http://schemas.openxmlformats.org/drawingml/2006/main">
               <a:ext uri="{FF2B5EF4-FFF2-40B4-BE49-F238E27FC236}">
-                <a16:creationId xmlns:a16="http://schemas.microsoft.com/office/drawing/2014/main" id="{162C722D-79C5-4F42-9A2C-9FE441C29E88}"/>
+                <a16:creationId xmlns:a16="http://schemas.microsoft.com/office/drawing/2014/main" id="{6033ACCA-C9C2-4337-9A10-D347C5CC4C47}"/>
               </a:ext>
             </a:extLst>
           </p:cNvPr>
@@ -7861,7 +7861,7 @@
           <p:cNvPr id="3" name="">
             <a:extLst xmlns:a="http://schemas.openxmlformats.org/drawingml/2006/main">
               <a:ext uri="{FF2B5EF4-FFF2-40B4-BE49-F238E27FC236}">
-                <a16:creationId xmlns:a16="http://schemas.microsoft.com/office/drawing/2014/main" id="{290CFA65-32C6-45A2-9ADD-F267FC34C932}"/>
+                <a16:creationId xmlns:a16="http://schemas.microsoft.com/office/drawing/2014/main" id="{DE4CC776-72E7-49EF-86B4-9F3C25D39AAB}"/>
               </a:ext>
             </a:extLst>
           </p:cNvPr>
@@ -7893,7 +7893,7 @@
           <p:cNvPr id="4" name="">
             <a:extLst xmlns:a="http://schemas.openxmlformats.org/drawingml/2006/main">
               <a:ext uri="{FF2B5EF4-FFF2-40B4-BE49-F238E27FC236}">
-                <a16:creationId xmlns:a16="http://schemas.microsoft.com/office/drawing/2014/main" id="{0C62F6B9-6675-4498-803B-20024815CF8D}"/>
+                <a16:creationId xmlns:a16="http://schemas.microsoft.com/office/drawing/2014/main" id="{86635432-AC89-48ED-9463-B41D27F7B032}"/>
               </a:ext>
             </a:extLst>
           </p:cNvPr>
@@ -7950,7 +7950,7 @@
           <p:cNvPr id="5" name="">
             <a:extLst xmlns:a="http://schemas.openxmlformats.org/drawingml/2006/main">
               <a:ext uri="{FF2B5EF4-FFF2-40B4-BE49-F238E27FC236}">
-                <a16:creationId xmlns:a16="http://schemas.microsoft.com/office/drawing/2014/main" id="{66C941D3-1117-4BEA-86C7-3003BB90805E}"/>
+                <a16:creationId xmlns:a16="http://schemas.microsoft.com/office/drawing/2014/main" id="{DA241302-E76E-43ED-9F3B-73B3FA92C3D0}"/>
               </a:ext>
             </a:extLst>
           </p:cNvPr>
@@ -8007,7 +8007,7 @@
           <p:cNvPr id="6" name="">
             <a:extLst xmlns:a="http://schemas.openxmlformats.org/drawingml/2006/main">
               <a:ext uri="{FF2B5EF4-FFF2-40B4-BE49-F238E27FC236}">
-                <a16:creationId xmlns:a16="http://schemas.microsoft.com/office/drawing/2014/main" id="{A21A3D38-B324-41A1-B25D-7D4A06555A07}"/>
+                <a16:creationId xmlns:a16="http://schemas.microsoft.com/office/drawing/2014/main" id="{3BACC64F-1A03-4741-9473-321A43B82894}"/>
               </a:ext>
             </a:extLst>
           </p:cNvPr>
@@ -8064,7 +8064,7 @@
           <p:cNvPr id="7" name="">
             <a:extLst xmlns:a="http://schemas.openxmlformats.org/drawingml/2006/main">
               <a:ext uri="{FF2B5EF4-FFF2-40B4-BE49-F238E27FC236}">
-                <a16:creationId xmlns:a16="http://schemas.microsoft.com/office/drawing/2014/main" id="{B6448994-44EA-4B8D-B59F-1D6567797E72}"/>
+                <a16:creationId xmlns:a16="http://schemas.microsoft.com/office/drawing/2014/main" id="{11FA30A7-A2DA-4F63-A53A-CCF93705E4DB}"/>
               </a:ext>
             </a:extLst>
           </p:cNvPr>
@@ -8096,7 +8096,7 @@
           <p:cNvPr id="8" name="">
             <a:extLst xmlns:a="http://schemas.openxmlformats.org/drawingml/2006/main">
               <a:ext uri="{FF2B5EF4-FFF2-40B4-BE49-F238E27FC236}">
-                <a16:creationId xmlns:a16="http://schemas.microsoft.com/office/drawing/2014/main" id="{BD440508-7E82-4BBC-A139-713C53BC082D}"/>
+                <a16:creationId xmlns:a16="http://schemas.microsoft.com/office/drawing/2014/main" id="{00AA7354-C751-48BD-A828-403FB56A65EF}"/>
               </a:ext>
             </a:extLst>
           </p:cNvPr>
@@ -8153,7 +8153,7 @@
           <p:cNvPr id="9" name="">
             <a:extLst xmlns:a="http://schemas.openxmlformats.org/drawingml/2006/main">
               <a:ext uri="{FF2B5EF4-FFF2-40B4-BE49-F238E27FC236}">
-                <a16:creationId xmlns:a16="http://schemas.microsoft.com/office/drawing/2014/main" id="{91C93C14-CAC3-4044-B349-6FD26AD532D7}"/>
+                <a16:creationId xmlns:a16="http://schemas.microsoft.com/office/drawing/2014/main" id="{1392A789-D518-4773-A3CC-E5F6C90277B2}"/>
               </a:ext>
             </a:extLst>
           </p:cNvPr>
@@ -8210,19 +8210,19 @@
           <p:cNvPr id="10" name="">
             <a:extLst xmlns:a="http://schemas.openxmlformats.org/drawingml/2006/main">
               <a:ext uri="{FF2B5EF4-FFF2-40B4-BE49-F238E27FC236}">
-                <a16:creationId xmlns:a16="http://schemas.microsoft.com/office/drawing/2014/main" id="{0A83B62C-D929-4D8F-A95F-8A9FE81E8A6E}"/>
-              </a:ext>
-            </a:extLst>
-          </p:cNvPr>
-          <p:cNvSpPr>
-            <a:spLocks xmlns:a="http://schemas.openxmlformats.org/drawingml/2006/main" noGrp="1"/>
-          </p:cNvSpPr>
-          <p:nvPr/>
-        </p:nvSpPr>
-        <p:spPr>
-          <a:xfrm xmlns:a="http://schemas.openxmlformats.org/drawingml/2006/main">
-            <a:off x="914400" y="1257300"/>
-            <a:ext cx="10363200" cy="781050"/>
+                <a16:creationId xmlns:a16="http://schemas.microsoft.com/office/drawing/2014/main" id="{F3BA0BD8-F093-4CD7-82E5-2A19624AA205}"/>
+              </a:ext>
+            </a:extLst>
+          </p:cNvPr>
+          <p:cNvSpPr>
+            <a:spLocks xmlns:a="http://schemas.openxmlformats.org/drawingml/2006/main" noGrp="1"/>
+          </p:cNvSpPr>
+          <p:nvPr/>
+        </p:nvSpPr>
+        <p:spPr>
+          <a:xfrm xmlns:a="http://schemas.openxmlformats.org/drawingml/2006/main">
+            <a:off x="857250" y="1219200"/>
+            <a:ext cx="10477500" cy="742950"/>
           </a:xfrm>
           <a:prstGeom xmlns:a="http://schemas.openxmlformats.org/drawingml/2006/main" prst="rect">
             <a:avLst/>
@@ -8239,7 +8239,7 @@
           <a:lstStyle xmlns:a="http://schemas.openxmlformats.org/drawingml/2006/main"/>
           <a:p xmlns:a="http://schemas.openxmlformats.org/drawingml/2006/main">
             <a:pPr algn="ctr">
-              <a:defRPr sz="2175" b="1">
+              <a:defRPr sz="2100" b="1">
                 <a:solidFill>
                   <a:srgbClr val="17253A"/>
                 </a:solidFill>
@@ -8249,7 +8249,7 @@
               </a:defRPr>
             </a:pPr>
             <a:r>
-              <a:rPr sz="2175" b="1">
+              <a:rPr sz="2100" b="1">
                 <a:solidFill>
                   <a:srgbClr val="17253A"/>
                 </a:solidFill>
@@ -8267,28 +8267,30 @@
           <p:cNvPr id="11" name="">
             <a:extLst xmlns:a="http://schemas.openxmlformats.org/drawingml/2006/main">
               <a:ext uri="{FF2B5EF4-FFF2-40B4-BE49-F238E27FC236}">
-                <a16:creationId xmlns:a16="http://schemas.microsoft.com/office/drawing/2014/main" id="{4C007165-B7A6-405C-B6A8-77EF08FBD407}"/>
-              </a:ext>
-            </a:extLst>
-          </p:cNvPr>
-          <p:cNvSpPr>
-            <a:spLocks xmlns:a="http://schemas.openxmlformats.org/drawingml/2006/main" noGrp="1"/>
-          </p:cNvSpPr>
-          <p:nvPr/>
-        </p:nvSpPr>
-        <p:spPr>
-          <a:xfrm xmlns:a="http://schemas.openxmlformats.org/drawingml/2006/main">
-            <a:off x="1000125" y="2247900"/>
-            <a:ext cx="476250" cy="476250"/>
-          </a:xfrm>
-          <a:prstGeom xmlns:a="http://schemas.openxmlformats.org/drawingml/2006/main" prst="ellipse">
+                <a16:creationId xmlns:a16="http://schemas.microsoft.com/office/drawing/2014/main" id="{A36554A6-AA07-4C30-9633-F45010A00B1C}"/>
+              </a:ext>
+            </a:extLst>
+          </p:cNvPr>
+          <p:cNvSpPr>
+            <a:spLocks xmlns:a="http://schemas.openxmlformats.org/drawingml/2006/main" noGrp="1"/>
+          </p:cNvSpPr>
+          <p:nvPr/>
+        </p:nvSpPr>
+        <p:spPr>
+          <a:xfrm xmlns:a="http://schemas.openxmlformats.org/drawingml/2006/main">
+            <a:off x="971550" y="2124075"/>
+            <a:ext cx="38100" cy="3524250"/>
+          </a:xfrm>
+          <a:prstGeom xmlns:a="http://schemas.openxmlformats.org/drawingml/2006/main" prst="rect">
             <a:avLst/>
           </a:prstGeom>
           <a:solidFill xmlns:a="http://schemas.openxmlformats.org/drawingml/2006/main">
-            <a:srgbClr val="18324A"/>
+            <a:srgbClr val="2C6E73"/>
           </a:solidFill>
           <a:ln xmlns:a="http://schemas.openxmlformats.org/drawingml/2006/main" w="0">
-            <a:noFill/>
+            <a:solidFill>
+              <a:srgbClr val="2C6E73"/>
+            </a:solidFill>
           </a:ln>
         </p:spPr>
       </p:sp>
@@ -8297,19 +8299,19 @@
           <p:cNvPr id="12" name="">
             <a:extLst xmlns:a="http://schemas.openxmlformats.org/drawingml/2006/main">
               <a:ext uri="{FF2B5EF4-FFF2-40B4-BE49-F238E27FC236}">
-                <a16:creationId xmlns:a16="http://schemas.microsoft.com/office/drawing/2014/main" id="{DF803714-2FAC-4022-84E9-3FF2DF60F80B}"/>
-              </a:ext>
-            </a:extLst>
-          </p:cNvPr>
-          <p:cNvSpPr>
-            <a:spLocks xmlns:a="http://schemas.openxmlformats.org/drawingml/2006/main" noGrp="1"/>
-          </p:cNvSpPr>
-          <p:nvPr/>
-        </p:nvSpPr>
-        <p:spPr>
-          <a:xfrm xmlns:a="http://schemas.openxmlformats.org/drawingml/2006/main">
-            <a:off x="1000125" y="2276475"/>
-            <a:ext cx="476250" cy="419100"/>
+                <a16:creationId xmlns:a16="http://schemas.microsoft.com/office/drawing/2014/main" id="{B4BED5C5-4C16-4C1C-8436-F2F4038A624D}"/>
+              </a:ext>
+            </a:extLst>
+          </p:cNvPr>
+          <p:cNvSpPr>
+            <a:spLocks xmlns:a="http://schemas.openxmlformats.org/drawingml/2006/main" noGrp="1"/>
+          </p:cNvSpPr>
+          <p:nvPr/>
+        </p:nvSpPr>
+        <p:spPr>
+          <a:xfrm xmlns:a="http://schemas.openxmlformats.org/drawingml/2006/main">
+            <a:off x="1162050" y="2200275"/>
+            <a:ext cx="400050" cy="400050"/>
           </a:xfrm>
           <a:prstGeom xmlns:a="http://schemas.openxmlformats.org/drawingml/2006/main" prst="rect">
             <a:avLst/>
@@ -8326,9 +8328,9 @@
           <a:lstStyle xmlns:a="http://schemas.openxmlformats.org/drawingml/2006/main"/>
           <a:p xmlns:a="http://schemas.openxmlformats.org/drawingml/2006/main">
             <a:pPr algn="ctr">
-              <a:defRPr sz="1350" b="1">
-                <a:solidFill>
-                  <a:srgbClr val="FFFFFF"/>
+              <a:defRPr sz="1125" b="1">
+                <a:solidFill>
+                  <a:srgbClr val="2C6E73"/>
                 </a:solidFill>
                 <a:latin typeface="Arial"/>
                 <a:ea typeface="Arial"/>
@@ -8336,9 +8338,9 @@
               </a:defRPr>
             </a:pPr>
             <a:r>
-              <a:rPr sz="1350" b="1">
-                <a:solidFill>
-                  <a:srgbClr val="FFFFFF"/>
+              <a:rPr sz="1125" b="1">
+                <a:solidFill>
+                  <a:srgbClr val="2C6E73"/>
                 </a:solidFill>
                 <a:latin typeface="Arial"/>
                 <a:ea typeface="Arial"/>
@@ -8354,19 +8356,19 @@
           <p:cNvPr id="13" name="">
             <a:extLst xmlns:a="http://schemas.openxmlformats.org/drawingml/2006/main">
               <a:ext uri="{FF2B5EF4-FFF2-40B4-BE49-F238E27FC236}">
-                <a16:creationId xmlns:a16="http://schemas.microsoft.com/office/drawing/2014/main" id="{C3FFA9FC-2356-4F23-8005-913773F2FAD2}"/>
-              </a:ext>
-            </a:extLst>
-          </p:cNvPr>
-          <p:cNvSpPr>
-            <a:spLocks xmlns:a="http://schemas.openxmlformats.org/drawingml/2006/main" noGrp="1"/>
-          </p:cNvSpPr>
-          <p:nvPr/>
-        </p:nvSpPr>
-        <p:spPr>
-          <a:xfrm xmlns:a="http://schemas.openxmlformats.org/drawingml/2006/main">
-            <a:off x="1714500" y="2181225"/>
-            <a:ext cx="9429750" cy="609600"/>
+                <a16:creationId xmlns:a16="http://schemas.microsoft.com/office/drawing/2014/main" id="{53984D9E-58E7-47B0-9767-8207234A38A5}"/>
+              </a:ext>
+            </a:extLst>
+          </p:cNvPr>
+          <p:cNvSpPr>
+            <a:spLocks xmlns:a="http://schemas.openxmlformats.org/drawingml/2006/main" noGrp="1"/>
+          </p:cNvSpPr>
+          <p:nvPr/>
+        </p:nvSpPr>
+        <p:spPr>
+          <a:xfrm xmlns:a="http://schemas.openxmlformats.org/drawingml/2006/main">
+            <a:off x="1714500" y="2114550"/>
+            <a:ext cx="9525000" cy="809625"/>
           </a:xfrm>
           <a:prstGeom xmlns:a="http://schemas.openxmlformats.org/drawingml/2006/main" prst="rect">
             <a:avLst/>
@@ -8383,7 +8385,7 @@
           <a:lstStyle xmlns:a="http://schemas.openxmlformats.org/drawingml/2006/main"/>
           <a:p xmlns:a="http://schemas.openxmlformats.org/drawingml/2006/main">
             <a:pPr algn="l">
-              <a:defRPr sz="1500" b="0">
+              <a:defRPr sz="1725" b="0">
                 <a:solidFill>
                   <a:srgbClr val="17253A"/>
                 </a:solidFill>
@@ -8393,7 +8395,7 @@
               </a:defRPr>
             </a:pPr>
             <a:r>
-              <a:rPr sz="1500" b="0">
+              <a:rPr sz="1725" b="0">
                 <a:solidFill>
                   <a:srgbClr val="17253A"/>
                 </a:solidFill>
@@ -8401,7 +8403,7 @@
                 <a:ea typeface="Arial"/>
                 <a:cs typeface="Arial"/>
               </a:rPr>
-              <a:t>Identify the structure: Retrieve the relevant fact, representation or formula.</a:t>
+              <a:t>5x + 8 = 73 → 5x = 65 → x = 13</a:t>
             </a:r>
           </a:p>
         </p:txBody>
@@ -8411,28 +8413,30 @@
           <p:cNvPr id="14" name="">
             <a:extLst xmlns:a="http://schemas.openxmlformats.org/drawingml/2006/main">
               <a:ext uri="{FF2B5EF4-FFF2-40B4-BE49-F238E27FC236}">
-                <a16:creationId xmlns:a16="http://schemas.microsoft.com/office/drawing/2014/main" id="{DF893814-A106-42FE-8431-2915E13B1EE0}"/>
-              </a:ext>
-            </a:extLst>
-          </p:cNvPr>
-          <p:cNvSpPr>
-            <a:spLocks xmlns:a="http://schemas.openxmlformats.org/drawingml/2006/main" noGrp="1"/>
-          </p:cNvSpPr>
-          <p:nvPr/>
-        </p:nvSpPr>
-        <p:spPr>
-          <a:xfrm xmlns:a="http://schemas.openxmlformats.org/drawingml/2006/main">
-            <a:off x="1000125" y="2990850"/>
-            <a:ext cx="476250" cy="476250"/>
-          </a:xfrm>
-          <a:prstGeom xmlns:a="http://schemas.openxmlformats.org/drawingml/2006/main" prst="ellipse">
+                <a16:creationId xmlns:a16="http://schemas.microsoft.com/office/drawing/2014/main" id="{F17E0344-968B-40CD-8E31-31EF61D5C01F}"/>
+              </a:ext>
+            </a:extLst>
+          </p:cNvPr>
+          <p:cNvSpPr>
+            <a:spLocks xmlns:a="http://schemas.openxmlformats.org/drawingml/2006/main" noGrp="1"/>
+          </p:cNvSpPr>
+          <p:nvPr/>
+        </p:nvSpPr>
+        <p:spPr>
+          <a:xfrm xmlns:a="http://schemas.openxmlformats.org/drawingml/2006/main">
+            <a:off x="1714500" y="2943225"/>
+            <a:ext cx="9334500" cy="9525"/>
+          </a:xfrm>
+          <a:prstGeom xmlns:a="http://schemas.openxmlformats.org/drawingml/2006/main" prst="rect">
             <a:avLst/>
           </a:prstGeom>
           <a:solidFill xmlns:a="http://schemas.openxmlformats.org/drawingml/2006/main">
-            <a:srgbClr val="2C6E73"/>
+            <a:srgbClr val="D9E0E6"/>
           </a:solidFill>
           <a:ln xmlns:a="http://schemas.openxmlformats.org/drawingml/2006/main" w="0">
-            <a:noFill/>
+            <a:solidFill>
+              <a:srgbClr val="D9E0E6"/>
+            </a:solidFill>
           </a:ln>
         </p:spPr>
       </p:sp>
@@ -8441,19 +8445,19 @@
           <p:cNvPr id="15" name="">
             <a:extLst xmlns:a="http://schemas.openxmlformats.org/drawingml/2006/main">
               <a:ext uri="{FF2B5EF4-FFF2-40B4-BE49-F238E27FC236}">
-                <a16:creationId xmlns:a16="http://schemas.microsoft.com/office/drawing/2014/main" id="{23DB171E-4130-4DC5-9E17-843C50A6F03C}"/>
-              </a:ext>
-            </a:extLst>
-          </p:cNvPr>
-          <p:cNvSpPr>
-            <a:spLocks xmlns:a="http://schemas.openxmlformats.org/drawingml/2006/main" noGrp="1"/>
-          </p:cNvSpPr>
-          <p:nvPr/>
-        </p:nvSpPr>
-        <p:spPr>
-          <a:xfrm xmlns:a="http://schemas.openxmlformats.org/drawingml/2006/main">
-            <a:off x="1000125" y="3019425"/>
-            <a:ext cx="476250" cy="419100"/>
+                <a16:creationId xmlns:a16="http://schemas.microsoft.com/office/drawing/2014/main" id="{E6AEEFCF-9199-4AAF-89E0-83A6DAD82BA0}"/>
+              </a:ext>
+            </a:extLst>
+          </p:cNvPr>
+          <p:cNvSpPr>
+            <a:spLocks xmlns:a="http://schemas.openxmlformats.org/drawingml/2006/main" noGrp="1"/>
+          </p:cNvSpPr>
+          <p:nvPr/>
+        </p:nvSpPr>
+        <p:spPr>
+          <a:xfrm xmlns:a="http://schemas.openxmlformats.org/drawingml/2006/main">
+            <a:off x="1162050" y="3076575"/>
+            <a:ext cx="400050" cy="400050"/>
           </a:xfrm>
           <a:prstGeom xmlns:a="http://schemas.openxmlformats.org/drawingml/2006/main" prst="rect">
             <a:avLst/>
@@ -8470,9 +8474,9 @@
           <a:lstStyle xmlns:a="http://schemas.openxmlformats.org/drawingml/2006/main"/>
           <a:p xmlns:a="http://schemas.openxmlformats.org/drawingml/2006/main">
             <a:pPr algn="ctr">
-              <a:defRPr sz="1350" b="1">
-                <a:solidFill>
-                  <a:srgbClr val="FFFFFF"/>
+              <a:defRPr sz="1125" b="1">
+                <a:solidFill>
+                  <a:srgbClr val="2C6E73"/>
                 </a:solidFill>
                 <a:latin typeface="Arial"/>
                 <a:ea typeface="Arial"/>
@@ -8480,9 +8484,9 @@
               </a:defRPr>
             </a:pPr>
             <a:r>
-              <a:rPr sz="1350" b="1">
-                <a:solidFill>
-                  <a:srgbClr val="FFFFFF"/>
+              <a:rPr sz="1125" b="1">
+                <a:solidFill>
+                  <a:srgbClr val="2C6E73"/>
                 </a:solidFill>
                 <a:latin typeface="Arial"/>
                 <a:ea typeface="Arial"/>
@@ -8498,19 +8502,19 @@
           <p:cNvPr id="16" name="">
             <a:extLst xmlns:a="http://schemas.openxmlformats.org/drawingml/2006/main">
               <a:ext uri="{FF2B5EF4-FFF2-40B4-BE49-F238E27FC236}">
-                <a16:creationId xmlns:a16="http://schemas.microsoft.com/office/drawing/2014/main" id="{62D5CD0D-0D78-4020-8AEA-D8B50054B0D4}"/>
-              </a:ext>
-            </a:extLst>
-          </p:cNvPr>
-          <p:cNvSpPr>
-            <a:spLocks xmlns:a="http://schemas.openxmlformats.org/drawingml/2006/main" noGrp="1"/>
-          </p:cNvSpPr>
-          <p:nvPr/>
-        </p:nvSpPr>
-        <p:spPr>
-          <a:xfrm xmlns:a="http://schemas.openxmlformats.org/drawingml/2006/main">
-            <a:off x="1714500" y="2924175"/>
-            <a:ext cx="9429750" cy="609600"/>
+                <a16:creationId xmlns:a16="http://schemas.microsoft.com/office/drawing/2014/main" id="{FC0E97CF-BFA9-4CD5-87CD-3EC304B2B789}"/>
+              </a:ext>
+            </a:extLst>
+          </p:cNvPr>
+          <p:cNvSpPr>
+            <a:spLocks xmlns:a="http://schemas.openxmlformats.org/drawingml/2006/main" noGrp="1"/>
+          </p:cNvSpPr>
+          <p:nvPr/>
+        </p:nvSpPr>
+        <p:spPr>
+          <a:xfrm xmlns:a="http://schemas.openxmlformats.org/drawingml/2006/main">
+            <a:off x="1714500" y="2990850"/>
+            <a:ext cx="9525000" cy="809625"/>
           </a:xfrm>
           <a:prstGeom xmlns:a="http://schemas.openxmlformats.org/drawingml/2006/main" prst="rect">
             <a:avLst/>
@@ -8527,7 +8531,7 @@
           <a:lstStyle xmlns:a="http://schemas.openxmlformats.org/drawingml/2006/main"/>
           <a:p xmlns:a="http://schemas.openxmlformats.org/drawingml/2006/main">
             <a:pPr algn="l">
-              <a:defRPr sz="1500" b="0">
+              <a:defRPr sz="1725" b="0">
                 <a:solidFill>
                   <a:srgbClr val="17253A"/>
                 </a:solidFill>
@@ -8537,7 +8541,7 @@
               </a:defRPr>
             </a:pPr>
             <a:r>
-              <a:rPr sz="1500" b="0">
+              <a:rPr sz="1725" b="0">
                 <a:solidFill>
                   <a:srgbClr val="17253A"/>
                 </a:solidFill>
@@ -8545,7 +8549,7 @@
                 <a:ea typeface="Arial"/>
                 <a:cs typeface="Arial"/>
               </a:rPr>
-              <a:t>Set up the method: Show a complete method and explain the mathematical decision.</a:t>
+              <a:t>3.45 km × 1,000</a:t>
             </a:r>
           </a:p>
         </p:txBody>
@@ -8555,28 +8559,30 @@
           <p:cNvPr id="17" name="">
             <a:extLst xmlns:a="http://schemas.openxmlformats.org/drawingml/2006/main">
               <a:ext uri="{FF2B5EF4-FFF2-40B4-BE49-F238E27FC236}">
-                <a16:creationId xmlns:a16="http://schemas.microsoft.com/office/drawing/2014/main" id="{0785348F-F91E-4221-968E-66EB0B215474}"/>
-              </a:ext>
-            </a:extLst>
-          </p:cNvPr>
-          <p:cNvSpPr>
-            <a:spLocks xmlns:a="http://schemas.openxmlformats.org/drawingml/2006/main" noGrp="1"/>
-          </p:cNvSpPr>
-          <p:nvPr/>
-        </p:nvSpPr>
-        <p:spPr>
-          <a:xfrm xmlns:a="http://schemas.openxmlformats.org/drawingml/2006/main">
-            <a:off x="1000125" y="3733800"/>
-            <a:ext cx="476250" cy="476250"/>
-          </a:xfrm>
-          <a:prstGeom xmlns:a="http://schemas.openxmlformats.org/drawingml/2006/main" prst="ellipse">
+                <a16:creationId xmlns:a16="http://schemas.microsoft.com/office/drawing/2014/main" id="{A415C0AC-BA51-4603-B010-E7ED0FAB6D80}"/>
+              </a:ext>
+            </a:extLst>
+          </p:cNvPr>
+          <p:cNvSpPr>
+            <a:spLocks xmlns:a="http://schemas.openxmlformats.org/drawingml/2006/main" noGrp="1"/>
+          </p:cNvSpPr>
+          <p:nvPr/>
+        </p:nvSpPr>
+        <p:spPr>
+          <a:xfrm xmlns:a="http://schemas.openxmlformats.org/drawingml/2006/main">
+            <a:off x="1714500" y="3819525"/>
+            <a:ext cx="9334500" cy="9525"/>
+          </a:xfrm>
+          <a:prstGeom xmlns:a="http://schemas.openxmlformats.org/drawingml/2006/main" prst="rect">
             <a:avLst/>
           </a:prstGeom>
           <a:solidFill xmlns:a="http://schemas.openxmlformats.org/drawingml/2006/main">
-            <a:srgbClr val="2C6E73"/>
+            <a:srgbClr val="D9E0E6"/>
           </a:solidFill>
           <a:ln xmlns:a="http://schemas.openxmlformats.org/drawingml/2006/main" w="0">
-            <a:noFill/>
+            <a:solidFill>
+              <a:srgbClr val="D9E0E6"/>
+            </a:solidFill>
           </a:ln>
         </p:spPr>
       </p:sp>
@@ -8585,19 +8591,19 @@
           <p:cNvPr id="18" name="">
             <a:extLst xmlns:a="http://schemas.openxmlformats.org/drawingml/2006/main">
               <a:ext uri="{FF2B5EF4-FFF2-40B4-BE49-F238E27FC236}">
-                <a16:creationId xmlns:a16="http://schemas.microsoft.com/office/drawing/2014/main" id="{5B37165F-4F4D-4AA0-A091-FD6902A4D8CE}"/>
-              </a:ext>
-            </a:extLst>
-          </p:cNvPr>
-          <p:cNvSpPr>
-            <a:spLocks xmlns:a="http://schemas.openxmlformats.org/drawingml/2006/main" noGrp="1"/>
-          </p:cNvSpPr>
-          <p:nvPr/>
-        </p:nvSpPr>
-        <p:spPr>
-          <a:xfrm xmlns:a="http://schemas.openxmlformats.org/drawingml/2006/main">
-            <a:off x="1000125" y="3762375"/>
-            <a:ext cx="476250" cy="419100"/>
+                <a16:creationId xmlns:a16="http://schemas.microsoft.com/office/drawing/2014/main" id="{937F72FB-A8BF-4E57-BADA-E26B1BE8E278}"/>
+              </a:ext>
+            </a:extLst>
+          </p:cNvPr>
+          <p:cNvSpPr>
+            <a:spLocks xmlns:a="http://schemas.openxmlformats.org/drawingml/2006/main" noGrp="1"/>
+          </p:cNvSpPr>
+          <p:nvPr/>
+        </p:nvSpPr>
+        <p:spPr>
+          <a:xfrm xmlns:a="http://schemas.openxmlformats.org/drawingml/2006/main">
+            <a:off x="1162050" y="3952875"/>
+            <a:ext cx="400050" cy="400050"/>
           </a:xfrm>
           <a:prstGeom xmlns:a="http://schemas.openxmlformats.org/drawingml/2006/main" prst="rect">
             <a:avLst/>
@@ -8614,9 +8620,9 @@
           <a:lstStyle xmlns:a="http://schemas.openxmlformats.org/drawingml/2006/main"/>
           <a:p xmlns:a="http://schemas.openxmlformats.org/drawingml/2006/main">
             <a:pPr algn="ctr">
-              <a:defRPr sz="1350" b="1">
-                <a:solidFill>
-                  <a:srgbClr val="FFFFFF"/>
+              <a:defRPr sz="1125" b="1">
+                <a:solidFill>
+                  <a:srgbClr val="2C6E73"/>
                 </a:solidFill>
                 <a:latin typeface="Arial"/>
                 <a:ea typeface="Arial"/>
@@ -8624,9 +8630,9 @@
               </a:defRPr>
             </a:pPr>
             <a:r>
-              <a:rPr sz="1350" b="1">
-                <a:solidFill>
-                  <a:srgbClr val="FFFFFF"/>
+              <a:rPr sz="1125" b="1">
+                <a:solidFill>
+                  <a:srgbClr val="2C6E73"/>
                 </a:solidFill>
                 <a:latin typeface="Arial"/>
                 <a:ea typeface="Arial"/>
@@ -8642,19 +8648,19 @@
           <p:cNvPr id="19" name="">
             <a:extLst xmlns:a="http://schemas.openxmlformats.org/drawingml/2006/main">
               <a:ext uri="{FF2B5EF4-FFF2-40B4-BE49-F238E27FC236}">
-                <a16:creationId xmlns:a16="http://schemas.microsoft.com/office/drawing/2014/main" id="{0EF7C9CF-2520-4296-A55D-6A9C2C6E5A46}"/>
-              </a:ext>
-            </a:extLst>
-          </p:cNvPr>
-          <p:cNvSpPr>
-            <a:spLocks xmlns:a="http://schemas.openxmlformats.org/drawingml/2006/main" noGrp="1"/>
-          </p:cNvSpPr>
-          <p:nvPr/>
-        </p:nvSpPr>
-        <p:spPr>
-          <a:xfrm xmlns:a="http://schemas.openxmlformats.org/drawingml/2006/main">
-            <a:off x="1714500" y="3667125"/>
-            <a:ext cx="9429750" cy="609600"/>
+                <a16:creationId xmlns:a16="http://schemas.microsoft.com/office/drawing/2014/main" id="{CE990151-4F76-46F0-8955-4C256E3E5D88}"/>
+              </a:ext>
+            </a:extLst>
+          </p:cNvPr>
+          <p:cNvSpPr>
+            <a:spLocks xmlns:a="http://schemas.openxmlformats.org/drawingml/2006/main" noGrp="1"/>
+          </p:cNvSpPr>
+          <p:nvPr/>
+        </p:nvSpPr>
+        <p:spPr>
+          <a:xfrm xmlns:a="http://schemas.openxmlformats.org/drawingml/2006/main">
+            <a:off x="1714500" y="3867150"/>
+            <a:ext cx="9525000" cy="809625"/>
           </a:xfrm>
           <a:prstGeom xmlns:a="http://schemas.openxmlformats.org/drawingml/2006/main" prst="rect">
             <a:avLst/>
@@ -8671,7 +8677,7 @@
           <a:lstStyle xmlns:a="http://schemas.openxmlformats.org/drawingml/2006/main"/>
           <a:p xmlns:a="http://schemas.openxmlformats.org/drawingml/2006/main">
             <a:pPr algn="l">
-              <a:defRPr sz="1500" b="0">
+              <a:defRPr sz="1725" b="0">
                 <a:solidFill>
                   <a:srgbClr val="17253A"/>
                 </a:solidFill>
@@ -8681,7 +8687,7 @@
               </a:defRPr>
             </a:pPr>
             <a:r>
-              <a:rPr sz="1500" b="0">
+              <a:rPr sz="1725" b="0">
                 <a:solidFill>
                   <a:srgbClr val="17253A"/>
                 </a:solidFill>
@@ -8689,7 +8695,7 @@
                 <a:ea typeface="Arial"/>
                 <a:cs typeface="Arial"/>
               </a:rPr>
-              <a:t>Complete the calculation: x = 13 and 3,450 m.</a:t>
+              <a:t>3.45 km = 3,450 m</a:t>
             </a:r>
           </a:p>
         </p:txBody>
@@ -8699,28 +8705,30 @@
           <p:cNvPr id="20" name="">
             <a:extLst xmlns:a="http://schemas.openxmlformats.org/drawingml/2006/main">
               <a:ext uri="{FF2B5EF4-FFF2-40B4-BE49-F238E27FC236}">
-                <a16:creationId xmlns:a16="http://schemas.microsoft.com/office/drawing/2014/main" id="{F0D61FC5-94B7-4FA6-96AA-45956E381738}"/>
-              </a:ext>
-            </a:extLst>
-          </p:cNvPr>
-          <p:cNvSpPr>
-            <a:spLocks xmlns:a="http://schemas.openxmlformats.org/drawingml/2006/main" noGrp="1"/>
-          </p:cNvSpPr>
-          <p:nvPr/>
-        </p:nvSpPr>
-        <p:spPr>
-          <a:xfrm xmlns:a="http://schemas.openxmlformats.org/drawingml/2006/main">
-            <a:off x="1000125" y="4476750"/>
-            <a:ext cx="476250" cy="476250"/>
-          </a:xfrm>
-          <a:prstGeom xmlns:a="http://schemas.openxmlformats.org/drawingml/2006/main" prst="ellipse">
+                <a16:creationId xmlns:a16="http://schemas.microsoft.com/office/drawing/2014/main" id="{CBBC1A0B-30B4-4BBE-B498-C0131C654582}"/>
+              </a:ext>
+            </a:extLst>
+          </p:cNvPr>
+          <p:cNvSpPr>
+            <a:spLocks xmlns:a="http://schemas.openxmlformats.org/drawingml/2006/main" noGrp="1"/>
+          </p:cNvSpPr>
+          <p:nvPr/>
+        </p:nvSpPr>
+        <p:spPr>
+          <a:xfrm xmlns:a="http://schemas.openxmlformats.org/drawingml/2006/main">
+            <a:off x="1714500" y="4695825"/>
+            <a:ext cx="9334500" cy="9525"/>
+          </a:xfrm>
+          <a:prstGeom xmlns:a="http://schemas.openxmlformats.org/drawingml/2006/main" prst="rect">
             <a:avLst/>
           </a:prstGeom>
           <a:solidFill xmlns:a="http://schemas.openxmlformats.org/drawingml/2006/main">
-            <a:srgbClr val="2C6E73"/>
+            <a:srgbClr val="D9E0E6"/>
           </a:solidFill>
           <a:ln xmlns:a="http://schemas.openxmlformats.org/drawingml/2006/main" w="0">
-            <a:noFill/>
+            <a:solidFill>
+              <a:srgbClr val="D9E0E6"/>
+            </a:solidFill>
           </a:ln>
         </p:spPr>
       </p:sp>
@@ -8729,19 +8737,19 @@
           <p:cNvPr id="21" name="">
             <a:extLst xmlns:a="http://schemas.openxmlformats.org/drawingml/2006/main">
               <a:ext uri="{FF2B5EF4-FFF2-40B4-BE49-F238E27FC236}">
-                <a16:creationId xmlns:a16="http://schemas.microsoft.com/office/drawing/2014/main" id="{3C9817E2-79B6-4DC8-BDF7-8717EB3C8DB6}"/>
-              </a:ext>
-            </a:extLst>
-          </p:cNvPr>
-          <p:cNvSpPr>
-            <a:spLocks xmlns:a="http://schemas.openxmlformats.org/drawingml/2006/main" noGrp="1"/>
-          </p:cNvSpPr>
-          <p:nvPr/>
-        </p:nvSpPr>
-        <p:spPr>
-          <a:xfrm xmlns:a="http://schemas.openxmlformats.org/drawingml/2006/main">
-            <a:off x="1000125" y="4505325"/>
-            <a:ext cx="476250" cy="419100"/>
+                <a16:creationId xmlns:a16="http://schemas.microsoft.com/office/drawing/2014/main" id="{B12DCE14-F758-4B94-BED0-2F510EF7E9B5}"/>
+              </a:ext>
+            </a:extLst>
+          </p:cNvPr>
+          <p:cNvSpPr>
+            <a:spLocks xmlns:a="http://schemas.openxmlformats.org/drawingml/2006/main" noGrp="1"/>
+          </p:cNvSpPr>
+          <p:nvPr/>
+        </p:nvSpPr>
+        <p:spPr>
+          <a:xfrm xmlns:a="http://schemas.openxmlformats.org/drawingml/2006/main">
+            <a:off x="1162050" y="4829175"/>
+            <a:ext cx="400050" cy="400050"/>
           </a:xfrm>
           <a:prstGeom xmlns:a="http://schemas.openxmlformats.org/drawingml/2006/main" prst="rect">
             <a:avLst/>
@@ -8758,9 +8766,9 @@
           <a:lstStyle xmlns:a="http://schemas.openxmlformats.org/drawingml/2006/main"/>
           <a:p xmlns:a="http://schemas.openxmlformats.org/drawingml/2006/main">
             <a:pPr algn="ctr">
-              <a:defRPr sz="1350" b="1">
-                <a:solidFill>
-                  <a:srgbClr val="FFFFFF"/>
+              <a:defRPr sz="1125" b="1">
+                <a:solidFill>
+                  <a:srgbClr val="2F785D"/>
                 </a:solidFill>
                 <a:latin typeface="Arial"/>
                 <a:ea typeface="Arial"/>
@@ -8768,9 +8776,9 @@
               </a:defRPr>
             </a:pPr>
             <a:r>
-              <a:rPr sz="1350" b="1">
-                <a:solidFill>
-                  <a:srgbClr val="FFFFFF"/>
+              <a:rPr sz="1125" b="1">
+                <a:solidFill>
+                  <a:srgbClr val="2F785D"/>
                 </a:solidFill>
                 <a:latin typeface="Arial"/>
                 <a:ea typeface="Arial"/>
@@ -8786,19 +8794,19 @@
           <p:cNvPr id="22" name="">
             <a:extLst xmlns:a="http://schemas.openxmlformats.org/drawingml/2006/main">
               <a:ext uri="{FF2B5EF4-FFF2-40B4-BE49-F238E27FC236}">
-                <a16:creationId xmlns:a16="http://schemas.microsoft.com/office/drawing/2014/main" id="{EF1DB5C8-5441-4276-8F8C-F33ABE3047FB}"/>
-              </a:ext>
-            </a:extLst>
-          </p:cNvPr>
-          <p:cNvSpPr>
-            <a:spLocks xmlns:a="http://schemas.openxmlformats.org/drawingml/2006/main" noGrp="1"/>
-          </p:cNvSpPr>
-          <p:nvPr/>
-        </p:nvSpPr>
-        <p:spPr>
-          <a:xfrm xmlns:a="http://schemas.openxmlformats.org/drawingml/2006/main">
-            <a:off x="1714500" y="4410075"/>
-            <a:ext cx="9429750" cy="609600"/>
+                <a16:creationId xmlns:a16="http://schemas.microsoft.com/office/drawing/2014/main" id="{54930584-812B-4051-B47A-8C359F8AF227}"/>
+              </a:ext>
+            </a:extLst>
+          </p:cNvPr>
+          <p:cNvSpPr>
+            <a:spLocks xmlns:a="http://schemas.openxmlformats.org/drawingml/2006/main" noGrp="1"/>
+          </p:cNvSpPr>
+          <p:nvPr/>
+        </p:nvSpPr>
+        <p:spPr>
+          <a:xfrm xmlns:a="http://schemas.openxmlformats.org/drawingml/2006/main">
+            <a:off x="1714500" y="4743450"/>
+            <a:ext cx="9525000" cy="809625"/>
           </a:xfrm>
           <a:prstGeom xmlns:a="http://schemas.openxmlformats.org/drawingml/2006/main" prst="rect">
             <a:avLst/>
@@ -8815,7 +8823,7 @@
           <a:lstStyle xmlns:a="http://schemas.openxmlformats.org/drawingml/2006/main"/>
           <a:p xmlns:a="http://schemas.openxmlformats.org/drawingml/2006/main">
             <a:pPr algn="l">
-              <a:defRPr sz="1500" b="1">
+              <a:defRPr sz="1725" b="1">
                 <a:solidFill>
                   <a:srgbClr val="2F785D"/>
                 </a:solidFill>
@@ -8825,7 +8833,7 @@
               </a:defRPr>
             </a:pPr>
             <a:r>
-              <a:rPr sz="1500" b="1">
+              <a:rPr sz="1725" b="1">
                 <a:solidFill>
                   <a:srgbClr val="2F785D"/>
                 </a:solidFill>
@@ -8833,7 +8841,7 @@
                 <a:ea typeface="Arial"/>
                 <a:cs typeface="Arial"/>
               </a:rPr>
-              <a:t>Check the result: Check the result and record a precise transition target.</a:t>
+              <a:t>Answers: x = 13 and 3,450 m</a:t>
             </a:r>
           </a:p>
         </p:txBody>
@@ -8841,7 +8849,7 @@
     </p:spTree>
     <p:extLst>
       <p:ext uri="{BB962C8B-B14F-4D97-AF65-F5344CB8AC3E}">
-        <p14:creationId xmlns:p14="http://schemas.microsoft.com/office/powerpoint/2010/main" val="711897404"/>
+        <p14:creationId xmlns:p14="http://schemas.microsoft.com/office/powerpoint/2010/main" val="984871216"/>
       </p:ext>
     </p:extLst>
   </p:cSld>
@@ -9134,7 +9142,7 @@
           <p:cNvPr id="15" name="">
             <a:extLst xmlns:a="http://schemas.openxmlformats.org/drawingml/2006/main">
               <a:ext uri="{FF2B5EF4-FFF2-40B4-BE49-F238E27FC236}">
-                <a16:creationId xmlns:a16="http://schemas.microsoft.com/office/drawing/2014/main" id="{811683D6-F329-404F-AABA-E8BE8B943805}"/>
+                <a16:creationId xmlns:a16="http://schemas.microsoft.com/office/drawing/2014/main" id="{07C3A85A-FA58-4501-80E6-E4D253D0D673}"/>
               </a:ext>
             </a:extLst>
           </p:cNvPr>
@@ -9166,7 +9174,7 @@
           <p:cNvPr id="2" name="">
             <a:extLst xmlns:a="http://schemas.openxmlformats.org/drawingml/2006/main">
               <a:ext uri="{FF2B5EF4-FFF2-40B4-BE49-F238E27FC236}">
-                <a16:creationId xmlns:a16="http://schemas.microsoft.com/office/drawing/2014/main" id="{C6DC2B58-5A95-47D6-A106-963348E1C454}"/>
+                <a16:creationId xmlns:a16="http://schemas.microsoft.com/office/drawing/2014/main" id="{5CCB22B0-FB39-4ACC-9916-316669EEC040}"/>
               </a:ext>
             </a:extLst>
           </p:cNvPr>
@@ -9223,7 +9231,7 @@
           <p:cNvPr id="3" name="">
             <a:extLst xmlns:a="http://schemas.openxmlformats.org/drawingml/2006/main">
               <a:ext uri="{FF2B5EF4-FFF2-40B4-BE49-F238E27FC236}">
-                <a16:creationId xmlns:a16="http://schemas.microsoft.com/office/drawing/2014/main" id="{87A3E073-C042-4686-BE91-F7A2E85A95E3}"/>
+                <a16:creationId xmlns:a16="http://schemas.microsoft.com/office/drawing/2014/main" id="{6859E2F0-B7FD-4888-9845-A5BDAA261C14}"/>
               </a:ext>
             </a:extLst>
           </p:cNvPr>
@@ -9255,7 +9263,7 @@
           <p:cNvPr id="4" name="">
             <a:extLst xmlns:a="http://schemas.openxmlformats.org/drawingml/2006/main">
               <a:ext uri="{FF2B5EF4-FFF2-40B4-BE49-F238E27FC236}">
-                <a16:creationId xmlns:a16="http://schemas.microsoft.com/office/drawing/2014/main" id="{5D4C3547-7142-4DFD-8CCE-50D6D6CE8F16}"/>
+                <a16:creationId xmlns:a16="http://schemas.microsoft.com/office/drawing/2014/main" id="{69829E3C-A9C5-463B-8460-93C0775A1C01}"/>
               </a:ext>
             </a:extLst>
           </p:cNvPr>
@@ -9312,7 +9320,7 @@
           <p:cNvPr id="5" name="">
             <a:extLst xmlns:a="http://schemas.openxmlformats.org/drawingml/2006/main">
               <a:ext uri="{FF2B5EF4-FFF2-40B4-BE49-F238E27FC236}">
-                <a16:creationId xmlns:a16="http://schemas.microsoft.com/office/drawing/2014/main" id="{1289CCFA-F514-426B-B2FE-2E4F185A8CBE}"/>
+                <a16:creationId xmlns:a16="http://schemas.microsoft.com/office/drawing/2014/main" id="{51A8BF8C-851B-472A-838D-E5F7EA99AC94}"/>
               </a:ext>
             </a:extLst>
           </p:cNvPr>
@@ -9369,7 +9377,7 @@
           <p:cNvPr id="6" name="">
             <a:extLst xmlns:a="http://schemas.openxmlformats.org/drawingml/2006/main">
               <a:ext uri="{FF2B5EF4-FFF2-40B4-BE49-F238E27FC236}">
-                <a16:creationId xmlns:a16="http://schemas.microsoft.com/office/drawing/2014/main" id="{A6CF11F7-9A1F-466D-9DB5-C5F09DDC96D7}"/>
+                <a16:creationId xmlns:a16="http://schemas.microsoft.com/office/drawing/2014/main" id="{D87C0205-7855-48D5-A911-303D3B72D5F5}"/>
               </a:ext>
             </a:extLst>
           </p:cNvPr>
@@ -9426,7 +9434,7 @@
           <p:cNvPr id="7" name="">
             <a:extLst xmlns:a="http://schemas.openxmlformats.org/drawingml/2006/main">
               <a:ext uri="{FF2B5EF4-FFF2-40B4-BE49-F238E27FC236}">
-                <a16:creationId xmlns:a16="http://schemas.microsoft.com/office/drawing/2014/main" id="{D3694660-E3F0-406B-8326-48B979077973}"/>
+                <a16:creationId xmlns:a16="http://schemas.microsoft.com/office/drawing/2014/main" id="{3C0F7D8A-B9CE-491F-9A3C-51D318DB1F84}"/>
               </a:ext>
             </a:extLst>
           </p:cNvPr>
@@ -9458,7 +9466,7 @@
           <p:cNvPr id="8" name="">
             <a:extLst xmlns:a="http://schemas.openxmlformats.org/drawingml/2006/main">
               <a:ext uri="{FF2B5EF4-FFF2-40B4-BE49-F238E27FC236}">
-                <a16:creationId xmlns:a16="http://schemas.microsoft.com/office/drawing/2014/main" id="{D589E92B-3E88-4ED4-B538-8A2CD5F0EBF5}"/>
+                <a16:creationId xmlns:a16="http://schemas.microsoft.com/office/drawing/2014/main" id="{F756446A-A843-4FC0-9CEA-CB0473C9CB36}"/>
               </a:ext>
             </a:extLst>
           </p:cNvPr>
@@ -9515,7 +9523,7 @@
           <p:cNvPr id="9" name="">
             <a:extLst xmlns:a="http://schemas.openxmlformats.org/drawingml/2006/main">
               <a:ext uri="{FF2B5EF4-FFF2-40B4-BE49-F238E27FC236}">
-                <a16:creationId xmlns:a16="http://schemas.microsoft.com/office/drawing/2014/main" id="{46168B2E-E7EA-4713-8240-2CC524EB73F8}"/>
+                <a16:creationId xmlns:a16="http://schemas.microsoft.com/office/drawing/2014/main" id="{19C2C683-890A-4759-9F83-A929FEDF7695}"/>
               </a:ext>
             </a:extLst>
           </p:cNvPr>
@@ -9572,7 +9580,7 @@
           <p:cNvPr id="10" name="">
             <a:extLst xmlns:a="http://schemas.openxmlformats.org/drawingml/2006/main">
               <a:ext uri="{FF2B5EF4-FFF2-40B4-BE49-F238E27FC236}">
-                <a16:creationId xmlns:a16="http://schemas.microsoft.com/office/drawing/2014/main" id="{3F009976-42A8-438E-8725-1E770CB496A2}"/>
+                <a16:creationId xmlns:a16="http://schemas.microsoft.com/office/drawing/2014/main" id="{809363B7-D443-41A8-8863-D397FBDAD92C}"/>
               </a:ext>
             </a:extLst>
           </p:cNvPr>
@@ -9629,7 +9637,7 @@
           <p:cNvPr id="11" name="">
             <a:extLst xmlns:a="http://schemas.openxmlformats.org/drawingml/2006/main">
               <a:ext uri="{FF2B5EF4-FFF2-40B4-BE49-F238E27FC236}">
-                <a16:creationId xmlns:a16="http://schemas.microsoft.com/office/drawing/2014/main" id="{A99E97CC-5C6D-4936-9AEA-F7C1AFD83201}"/>
+                <a16:creationId xmlns:a16="http://schemas.microsoft.com/office/drawing/2014/main" id="{74525006-2D5D-4796-8662-CC45F952E76C}"/>
               </a:ext>
             </a:extLst>
           </p:cNvPr>
@@ -9686,7 +9694,7 @@
           <p:cNvPr id="12" name="">
             <a:extLst xmlns:a="http://schemas.openxmlformats.org/drawingml/2006/main">
               <a:ext uri="{FF2B5EF4-FFF2-40B4-BE49-F238E27FC236}">
-                <a16:creationId xmlns:a16="http://schemas.microsoft.com/office/drawing/2014/main" id="{1094F388-E2E6-4C68-BFBC-F72AAA05DDE8}"/>
+                <a16:creationId xmlns:a16="http://schemas.microsoft.com/office/drawing/2014/main" id="{3DE8E592-1CF5-43C5-9C8D-75EA581C5DC4}"/>
               </a:ext>
             </a:extLst>
           </p:cNvPr>
@@ -9718,7 +9726,7 @@
           <p:cNvPr id="13" name="">
             <a:extLst xmlns:a="http://schemas.openxmlformats.org/drawingml/2006/main">
               <a:ext uri="{FF2B5EF4-FFF2-40B4-BE49-F238E27FC236}">
-                <a16:creationId xmlns:a16="http://schemas.microsoft.com/office/drawing/2014/main" id="{3A92ECC1-212B-404C-BA66-49BA6442D600}"/>
+                <a16:creationId xmlns:a16="http://schemas.microsoft.com/office/drawing/2014/main" id="{91BBE7E7-23D2-4BCA-9135-BAFC47C0E624}"/>
               </a:ext>
             </a:extLst>
           </p:cNvPr>
@@ -9775,7 +9783,7 @@
           <p:cNvPr id="14" name="">
             <a:extLst xmlns:a="http://schemas.openxmlformats.org/drawingml/2006/main">
               <a:ext uri="{FF2B5EF4-FFF2-40B4-BE49-F238E27FC236}">
-                <a16:creationId xmlns:a16="http://schemas.microsoft.com/office/drawing/2014/main" id="{23B04E40-6688-4C63-8F4F-788674883C2B}"/>
+                <a16:creationId xmlns:a16="http://schemas.microsoft.com/office/drawing/2014/main" id="{359E2109-9B5F-4A43-B168-520563B64CF2}"/>
               </a:ext>
             </a:extLst>
           </p:cNvPr>
@@ -9830,7 +9838,7 @@
     </p:spTree>
     <p:extLst>
       <p:ext uri="{BB962C8B-B14F-4D97-AF65-F5344CB8AC3E}">
-        <p14:creationId xmlns:p14="http://schemas.microsoft.com/office/powerpoint/2010/main" val="30370727"/>
+        <p14:creationId xmlns:p14="http://schemas.microsoft.com/office/powerpoint/2010/main" val="1445517452"/>
       </p:ext>
     </p:extLst>
   </p:cSld>
@@ -10031,7 +10039,7 @@
           <p:cNvPr id="16" name="">
             <a:extLst xmlns:a="http://schemas.openxmlformats.org/drawingml/2006/main">
               <a:ext uri="{FF2B5EF4-FFF2-40B4-BE49-F238E27FC236}">
-                <a16:creationId xmlns:a16="http://schemas.microsoft.com/office/drawing/2014/main" id="{26CF5C67-4F98-40E3-BA94-B8D99733DFF9}"/>
+                <a16:creationId xmlns:a16="http://schemas.microsoft.com/office/drawing/2014/main" id="{6D50A702-A95F-46C9-8A92-AF8EE09192F8}"/>
               </a:ext>
             </a:extLst>
           </p:cNvPr>
@@ -10063,7 +10071,7 @@
           <p:cNvPr id="2" name="">
             <a:extLst xmlns:a="http://schemas.openxmlformats.org/drawingml/2006/main">
               <a:ext uri="{FF2B5EF4-FFF2-40B4-BE49-F238E27FC236}">
-                <a16:creationId xmlns:a16="http://schemas.microsoft.com/office/drawing/2014/main" id="{15B24935-9A62-4DEF-B481-94B456E6F9C8}"/>
+                <a16:creationId xmlns:a16="http://schemas.microsoft.com/office/drawing/2014/main" id="{051EF1BE-F067-4EF0-82BD-65C9169C7188}"/>
               </a:ext>
             </a:extLst>
           </p:cNvPr>
@@ -10120,7 +10128,7 @@
           <p:cNvPr id="3" name="">
             <a:extLst xmlns:a="http://schemas.openxmlformats.org/drawingml/2006/main">
               <a:ext uri="{FF2B5EF4-FFF2-40B4-BE49-F238E27FC236}">
-                <a16:creationId xmlns:a16="http://schemas.microsoft.com/office/drawing/2014/main" id="{24701911-E7A9-4B06-88D8-75BC1CDCFA26}"/>
+                <a16:creationId xmlns:a16="http://schemas.microsoft.com/office/drawing/2014/main" id="{22398A1E-81E1-4CCE-9684-80ABF612C1F3}"/>
               </a:ext>
             </a:extLst>
           </p:cNvPr>
@@ -10152,7 +10160,7 @@
           <p:cNvPr id="4" name="">
             <a:extLst xmlns:a="http://schemas.openxmlformats.org/drawingml/2006/main">
               <a:ext uri="{FF2B5EF4-FFF2-40B4-BE49-F238E27FC236}">
-                <a16:creationId xmlns:a16="http://schemas.microsoft.com/office/drawing/2014/main" id="{24349036-A5F6-42A3-86A4-58CE71DD43BD}"/>
+                <a16:creationId xmlns:a16="http://schemas.microsoft.com/office/drawing/2014/main" id="{84C42049-15D5-46E2-909C-A8C257946D91}"/>
               </a:ext>
             </a:extLst>
           </p:cNvPr>
@@ -10209,7 +10217,7 @@
           <p:cNvPr id="5" name="">
             <a:extLst xmlns:a="http://schemas.openxmlformats.org/drawingml/2006/main">
               <a:ext uri="{FF2B5EF4-FFF2-40B4-BE49-F238E27FC236}">
-                <a16:creationId xmlns:a16="http://schemas.microsoft.com/office/drawing/2014/main" id="{B816F21F-A54B-41B9-8DB5-0048D2F352F0}"/>
+                <a16:creationId xmlns:a16="http://schemas.microsoft.com/office/drawing/2014/main" id="{B9C1A4C3-7B1C-4069-B34C-472C5EB374DF}"/>
               </a:ext>
             </a:extLst>
           </p:cNvPr>
@@ -10266,7 +10274,7 @@
           <p:cNvPr id="6" name="">
             <a:extLst xmlns:a="http://schemas.openxmlformats.org/drawingml/2006/main">
               <a:ext uri="{FF2B5EF4-FFF2-40B4-BE49-F238E27FC236}">
-                <a16:creationId xmlns:a16="http://schemas.microsoft.com/office/drawing/2014/main" id="{AF03F0E8-1476-4053-97EE-20E9E3B1F8CB}"/>
+                <a16:creationId xmlns:a16="http://schemas.microsoft.com/office/drawing/2014/main" id="{E50BCB7C-0CAA-4973-A22B-F4BC62583C3F}"/>
               </a:ext>
             </a:extLst>
           </p:cNvPr>
@@ -10323,7 +10331,7 @@
           <p:cNvPr id="7" name="">
             <a:extLst xmlns:a="http://schemas.openxmlformats.org/drawingml/2006/main">
               <a:ext uri="{FF2B5EF4-FFF2-40B4-BE49-F238E27FC236}">
-                <a16:creationId xmlns:a16="http://schemas.microsoft.com/office/drawing/2014/main" id="{8C6A85DC-A022-46F6-9ED2-AC1CC9497136}"/>
+                <a16:creationId xmlns:a16="http://schemas.microsoft.com/office/drawing/2014/main" id="{DD51509F-5E2F-4EEE-AB8D-F0A580ED7533}"/>
               </a:ext>
             </a:extLst>
           </p:cNvPr>
@@ -10355,7 +10363,7 @@
           <p:cNvPr id="8" name="">
             <a:extLst xmlns:a="http://schemas.openxmlformats.org/drawingml/2006/main">
               <a:ext uri="{FF2B5EF4-FFF2-40B4-BE49-F238E27FC236}">
-                <a16:creationId xmlns:a16="http://schemas.microsoft.com/office/drawing/2014/main" id="{079BBFB3-BE41-411A-9255-CC19677174A8}"/>
+                <a16:creationId xmlns:a16="http://schemas.microsoft.com/office/drawing/2014/main" id="{F12A6BB1-6061-47D3-8FCA-008A0BBF17D4}"/>
               </a:ext>
             </a:extLst>
           </p:cNvPr>
@@ -10412,7 +10420,7 @@
           <p:cNvPr id="9" name="">
             <a:extLst xmlns:a="http://schemas.openxmlformats.org/drawingml/2006/main">
               <a:ext uri="{FF2B5EF4-FFF2-40B4-BE49-F238E27FC236}">
-                <a16:creationId xmlns:a16="http://schemas.microsoft.com/office/drawing/2014/main" id="{0FE2C8F6-A455-4D67-AC68-AB0A7E2E2F50}"/>
+                <a16:creationId xmlns:a16="http://schemas.microsoft.com/office/drawing/2014/main" id="{440236EB-2F75-4855-A32F-61F97E33398E}"/>
               </a:ext>
             </a:extLst>
           </p:cNvPr>
@@ -10469,7 +10477,7 @@
           <p:cNvPr id="10" name="">
             <a:extLst xmlns:a="http://schemas.openxmlformats.org/drawingml/2006/main">
               <a:ext uri="{FF2B5EF4-FFF2-40B4-BE49-F238E27FC236}">
-                <a16:creationId xmlns:a16="http://schemas.microsoft.com/office/drawing/2014/main" id="{04239AD8-C0B2-4BBC-97A9-8E4F68ADB566}"/>
+                <a16:creationId xmlns:a16="http://schemas.microsoft.com/office/drawing/2014/main" id="{866693AA-EAC0-4A77-A494-528991D46A2C}"/>
               </a:ext>
             </a:extLst>
           </p:cNvPr>
@@ -10526,7 +10534,7 @@
           <p:cNvPr id="11" name="">
             <a:extLst xmlns:a="http://schemas.openxmlformats.org/drawingml/2006/main">
               <a:ext uri="{FF2B5EF4-FFF2-40B4-BE49-F238E27FC236}">
-                <a16:creationId xmlns:a16="http://schemas.microsoft.com/office/drawing/2014/main" id="{EF89D448-8AC9-4CF0-8381-6D799235A44F}"/>
+                <a16:creationId xmlns:a16="http://schemas.microsoft.com/office/drawing/2014/main" id="{F54A89F6-137C-4137-89D6-91852CF073A5}"/>
               </a:ext>
             </a:extLst>
           </p:cNvPr>
@@ -10583,7 +10591,7 @@
           <p:cNvPr id="12" name="">
             <a:extLst xmlns:a="http://schemas.openxmlformats.org/drawingml/2006/main">
               <a:ext uri="{FF2B5EF4-FFF2-40B4-BE49-F238E27FC236}">
-                <a16:creationId xmlns:a16="http://schemas.microsoft.com/office/drawing/2014/main" id="{507B3AC7-EC46-42BD-9311-D6031DF04BAA}"/>
+                <a16:creationId xmlns:a16="http://schemas.microsoft.com/office/drawing/2014/main" id="{9847CED7-8392-4589-8113-138D871665C5}"/>
               </a:ext>
             </a:extLst>
           </p:cNvPr>
@@ -10640,7 +10648,7 @@
           <p:cNvPr id="13" name="">
             <a:extLst xmlns:a="http://schemas.openxmlformats.org/drawingml/2006/main">
               <a:ext uri="{FF2B5EF4-FFF2-40B4-BE49-F238E27FC236}">
-                <a16:creationId xmlns:a16="http://schemas.microsoft.com/office/drawing/2014/main" id="{729789B3-66B6-4BAC-AF9D-7F4281CA3DE3}"/>
+                <a16:creationId xmlns:a16="http://schemas.microsoft.com/office/drawing/2014/main" id="{8725A01E-AF52-4ED8-AB93-C88B45DD4813}"/>
               </a:ext>
             </a:extLst>
           </p:cNvPr>
@@ -10697,7 +10705,7 @@
           <p:cNvPr id="14" name="">
             <a:extLst xmlns:a="http://schemas.openxmlformats.org/drawingml/2006/main">
               <a:ext uri="{FF2B5EF4-FFF2-40B4-BE49-F238E27FC236}">
-                <a16:creationId xmlns:a16="http://schemas.microsoft.com/office/drawing/2014/main" id="{A780AC22-7CBB-47A2-83ED-E295B3B06574}"/>
+                <a16:creationId xmlns:a16="http://schemas.microsoft.com/office/drawing/2014/main" id="{54053D6E-2221-4E6C-AB7B-74D8E9D850C6}"/>
               </a:ext>
             </a:extLst>
           </p:cNvPr>
@@ -10754,7 +10762,7 @@
           <p:cNvPr id="15" name="">
             <a:extLst xmlns:a="http://schemas.openxmlformats.org/drawingml/2006/main">
               <a:ext uri="{FF2B5EF4-FFF2-40B4-BE49-F238E27FC236}">
-                <a16:creationId xmlns:a16="http://schemas.microsoft.com/office/drawing/2014/main" id="{1CCC3C52-32A1-43D9-9F44-BAF82B459F98}"/>
+                <a16:creationId xmlns:a16="http://schemas.microsoft.com/office/drawing/2014/main" id="{41DCF396-B200-4447-83B9-27B93DB1F5F3}"/>
               </a:ext>
             </a:extLst>
           </p:cNvPr>
@@ -10809,7 +10817,7 @@
     </p:spTree>
     <p:extLst>
       <p:ext uri="{BB962C8B-B14F-4D97-AF65-F5344CB8AC3E}">
-        <p14:creationId xmlns:p14="http://schemas.microsoft.com/office/powerpoint/2010/main" val="1273604031"/>
+        <p14:creationId xmlns:p14="http://schemas.microsoft.com/office/powerpoint/2010/main" val="1096201819"/>
       </p:ext>
     </p:extLst>
   </p:cSld>
@@ -10964,7 +10972,7 @@
           <p:cNvPr id="16" name="">
             <a:extLst xmlns:a="http://schemas.openxmlformats.org/drawingml/2006/main">
               <a:ext uri="{FF2B5EF4-FFF2-40B4-BE49-F238E27FC236}">
-                <a16:creationId xmlns:a16="http://schemas.microsoft.com/office/drawing/2014/main" id="{4C04C7FF-576A-45CF-B8CB-C3C6032978C0}"/>
+                <a16:creationId xmlns:a16="http://schemas.microsoft.com/office/drawing/2014/main" id="{B2CAC2C4-F15A-4CDB-B5FF-4533B3B27B1E}"/>
               </a:ext>
             </a:extLst>
           </p:cNvPr>
@@ -10996,7 +11004,7 @@
           <p:cNvPr id="2" name="">
             <a:extLst xmlns:a="http://schemas.openxmlformats.org/drawingml/2006/main">
               <a:ext uri="{FF2B5EF4-FFF2-40B4-BE49-F238E27FC236}">
-                <a16:creationId xmlns:a16="http://schemas.microsoft.com/office/drawing/2014/main" id="{8724AC93-7113-422A-9241-D52261BD3CC0}"/>
+                <a16:creationId xmlns:a16="http://schemas.microsoft.com/office/drawing/2014/main" id="{8786116D-5B9E-446E-A8D5-8829282CEC44}"/>
               </a:ext>
             </a:extLst>
           </p:cNvPr>
@@ -11053,7 +11061,7 @@
           <p:cNvPr id="3" name="">
             <a:extLst xmlns:a="http://schemas.openxmlformats.org/drawingml/2006/main">
               <a:ext uri="{FF2B5EF4-FFF2-40B4-BE49-F238E27FC236}">
-                <a16:creationId xmlns:a16="http://schemas.microsoft.com/office/drawing/2014/main" id="{E3E3E222-CA98-4668-981F-6C021B40A8AD}"/>
+                <a16:creationId xmlns:a16="http://schemas.microsoft.com/office/drawing/2014/main" id="{81FFCC73-89AE-44FA-9BBB-26CFF39DD703}"/>
               </a:ext>
             </a:extLst>
           </p:cNvPr>
@@ -11085,7 +11093,7 @@
           <p:cNvPr id="4" name="">
             <a:extLst xmlns:a="http://schemas.openxmlformats.org/drawingml/2006/main">
               <a:ext uri="{FF2B5EF4-FFF2-40B4-BE49-F238E27FC236}">
-                <a16:creationId xmlns:a16="http://schemas.microsoft.com/office/drawing/2014/main" id="{8DBD6679-A9E1-42AA-A5E2-167EFE787DCE}"/>
+                <a16:creationId xmlns:a16="http://schemas.microsoft.com/office/drawing/2014/main" id="{D727A599-05AC-43EC-B739-E7A139068D15}"/>
               </a:ext>
             </a:extLst>
           </p:cNvPr>
@@ -11142,7 +11150,7 @@
           <p:cNvPr id="5" name="">
             <a:extLst xmlns:a="http://schemas.openxmlformats.org/drawingml/2006/main">
               <a:ext uri="{FF2B5EF4-FFF2-40B4-BE49-F238E27FC236}">
-                <a16:creationId xmlns:a16="http://schemas.microsoft.com/office/drawing/2014/main" id="{888B7DDE-D428-4B94-B73E-4185C6D3C608}"/>
+                <a16:creationId xmlns:a16="http://schemas.microsoft.com/office/drawing/2014/main" id="{28F5BC6F-136A-4DE9-A31E-9C8D20B06CAC}"/>
               </a:ext>
             </a:extLst>
           </p:cNvPr>
@@ -11199,7 +11207,7 @@
           <p:cNvPr id="6" name="">
             <a:extLst xmlns:a="http://schemas.openxmlformats.org/drawingml/2006/main">
               <a:ext uri="{FF2B5EF4-FFF2-40B4-BE49-F238E27FC236}">
-                <a16:creationId xmlns:a16="http://schemas.microsoft.com/office/drawing/2014/main" id="{D6C0FBC4-21FC-41A5-8DC0-4FE1B100E29D}"/>
+                <a16:creationId xmlns:a16="http://schemas.microsoft.com/office/drawing/2014/main" id="{8D259724-86A3-4258-87FB-53AFCA7C7172}"/>
               </a:ext>
             </a:extLst>
           </p:cNvPr>
@@ -11256,7 +11264,7 @@
           <p:cNvPr id="7" name="">
             <a:extLst xmlns:a="http://schemas.openxmlformats.org/drawingml/2006/main">
               <a:ext uri="{FF2B5EF4-FFF2-40B4-BE49-F238E27FC236}">
-                <a16:creationId xmlns:a16="http://schemas.microsoft.com/office/drawing/2014/main" id="{B000DA0C-7E51-4BE1-ABEC-4130BDDA89DB}"/>
+                <a16:creationId xmlns:a16="http://schemas.microsoft.com/office/drawing/2014/main" id="{5EF06824-7981-459C-B6BA-AB11FE172360}"/>
               </a:ext>
             </a:extLst>
           </p:cNvPr>
@@ -11288,7 +11296,7 @@
           <p:cNvPr id="8" name="">
             <a:extLst xmlns:a="http://schemas.openxmlformats.org/drawingml/2006/main">
               <a:ext uri="{FF2B5EF4-FFF2-40B4-BE49-F238E27FC236}">
-                <a16:creationId xmlns:a16="http://schemas.microsoft.com/office/drawing/2014/main" id="{82A40F4A-A384-4123-BD50-CBA9E058F943}"/>
+                <a16:creationId xmlns:a16="http://schemas.microsoft.com/office/drawing/2014/main" id="{AC779C6E-A510-4058-BDEF-0F0BB7F75283}"/>
               </a:ext>
             </a:extLst>
           </p:cNvPr>
@@ -11345,7 +11353,7 @@
           <p:cNvPr id="9" name="">
             <a:extLst xmlns:a="http://schemas.openxmlformats.org/drawingml/2006/main">
               <a:ext uri="{FF2B5EF4-FFF2-40B4-BE49-F238E27FC236}">
-                <a16:creationId xmlns:a16="http://schemas.microsoft.com/office/drawing/2014/main" id="{4E75E17E-BE59-4D13-B026-DF17CD52B4DC}"/>
+                <a16:creationId xmlns:a16="http://schemas.microsoft.com/office/drawing/2014/main" id="{736D1415-65F2-4291-9C40-2B25CD1A785A}"/>
               </a:ext>
             </a:extLst>
           </p:cNvPr>
@@ -11406,7 +11414,7 @@
           <p:nvPr/>
         </p:nvPicPr>
         <p:blipFill>
-          <a:blip xmlns:r="http://schemas.openxmlformats.org/officeDocument/2006/relationships" xmlns:a="http://schemas.openxmlformats.org/drawingml/2006/main" r:embed="Rfae10d01a3a2410c"/>
+          <a:blip xmlns:r="http://schemas.openxmlformats.org/officeDocument/2006/relationships" xmlns:a="http://schemas.openxmlformats.org/drawingml/2006/main" r:embed="R5b2b41ec57ec4208"/>
           <a:stretch xmlns:a="http://schemas.openxmlformats.org/drawingml/2006/main"/>
         </p:blipFill>
         <p:spPr>
@@ -11424,7 +11432,7 @@
           <p:cNvPr id="11" name="">
             <a:extLst xmlns:a="http://schemas.openxmlformats.org/drawingml/2006/main">
               <a:ext uri="{FF2B5EF4-FFF2-40B4-BE49-F238E27FC236}">
-                <a16:creationId xmlns:a16="http://schemas.microsoft.com/office/drawing/2014/main" id="{6CFA5F60-E016-4B39-A529-92FD33157425}"/>
+                <a16:creationId xmlns:a16="http://schemas.microsoft.com/office/drawing/2014/main" id="{8983436C-E38F-4633-8FD4-EEB6AB97E4D1}"/>
               </a:ext>
             </a:extLst>
           </p:cNvPr>
@@ -11481,7 +11489,7 @@
           <p:cNvPr id="12" name="">
             <a:extLst xmlns:a="http://schemas.openxmlformats.org/drawingml/2006/main">
               <a:ext uri="{FF2B5EF4-FFF2-40B4-BE49-F238E27FC236}">
-                <a16:creationId xmlns:a16="http://schemas.microsoft.com/office/drawing/2014/main" id="{471AD417-2738-41EB-B7E1-4365BF123C7F}"/>
+                <a16:creationId xmlns:a16="http://schemas.microsoft.com/office/drawing/2014/main" id="{9D483326-8726-4BC7-98C7-4DEC963068BF}"/>
               </a:ext>
             </a:extLst>
           </p:cNvPr>
@@ -11538,7 +11546,7 @@
           <p:cNvPr id="13" name="">
             <a:extLst xmlns:a="http://schemas.openxmlformats.org/drawingml/2006/main">
               <a:ext uri="{FF2B5EF4-FFF2-40B4-BE49-F238E27FC236}">
-                <a16:creationId xmlns:a16="http://schemas.microsoft.com/office/drawing/2014/main" id="{FF614589-52CA-481E-97A9-4C9DF872F04B}"/>
+                <a16:creationId xmlns:a16="http://schemas.microsoft.com/office/drawing/2014/main" id="{0A85D82D-E065-4A9A-95FC-F56C027B0170}"/>
               </a:ext>
             </a:extLst>
           </p:cNvPr>
@@ -11570,7 +11578,7 @@
           <p:cNvPr id="14" name="">
             <a:extLst xmlns:a="http://schemas.openxmlformats.org/drawingml/2006/main">
               <a:ext uri="{FF2B5EF4-FFF2-40B4-BE49-F238E27FC236}">
-                <a16:creationId xmlns:a16="http://schemas.microsoft.com/office/drawing/2014/main" id="{2F3D412B-556E-4511-AE77-9508A3AFB4A4}"/>
+                <a16:creationId xmlns:a16="http://schemas.microsoft.com/office/drawing/2014/main" id="{E489760E-672B-4C77-A209-8C3BF1D18891}"/>
               </a:ext>
             </a:extLst>
           </p:cNvPr>
@@ -11627,7 +11635,7 @@
           <p:cNvPr id="15" name="">
             <a:extLst xmlns:a="http://schemas.openxmlformats.org/drawingml/2006/main">
               <a:ext uri="{FF2B5EF4-FFF2-40B4-BE49-F238E27FC236}">
-                <a16:creationId xmlns:a16="http://schemas.microsoft.com/office/drawing/2014/main" id="{4DE260F3-9A61-4436-BD59-3F9E9EE4D608}"/>
+                <a16:creationId xmlns:a16="http://schemas.microsoft.com/office/drawing/2014/main" id="{051B423C-617A-4C34-A1E8-7473B9973C73}"/>
               </a:ext>
             </a:extLst>
           </p:cNvPr>
@@ -11682,7 +11690,7 @@
     </p:spTree>
     <p:extLst>
       <p:ext uri="{BB962C8B-B14F-4D97-AF65-F5344CB8AC3E}">
-        <p14:creationId xmlns:p14="http://schemas.microsoft.com/office/powerpoint/2010/main" val="1474569786"/>
+        <p14:creationId xmlns:p14="http://schemas.microsoft.com/office/powerpoint/2010/main" val="364503813"/>
       </p:ext>
     </p:extLst>
   </p:cSld>
@@ -11837,7 +11845,7 @@
           <p:cNvPr id="23" name="">
             <a:extLst xmlns:a="http://schemas.openxmlformats.org/drawingml/2006/main">
               <a:ext uri="{FF2B5EF4-FFF2-40B4-BE49-F238E27FC236}">
-                <a16:creationId xmlns:a16="http://schemas.microsoft.com/office/drawing/2014/main" id="{F244ACD2-28B4-4492-8F87-65F9519E93BE}"/>
+                <a16:creationId xmlns:a16="http://schemas.microsoft.com/office/drawing/2014/main" id="{62C74943-BAB2-4C6D-A285-38FDB1A41B24}"/>
               </a:ext>
             </a:extLst>
           </p:cNvPr>
@@ -11869,7 +11877,7 @@
           <p:cNvPr id="2" name="">
             <a:extLst xmlns:a="http://schemas.openxmlformats.org/drawingml/2006/main">
               <a:ext uri="{FF2B5EF4-FFF2-40B4-BE49-F238E27FC236}">
-                <a16:creationId xmlns:a16="http://schemas.microsoft.com/office/drawing/2014/main" id="{92B7D0E3-E2CA-44B9-AD1F-E6E76F4238FB}"/>
+                <a16:creationId xmlns:a16="http://schemas.microsoft.com/office/drawing/2014/main" id="{DD8342DD-6B41-473D-B28C-538E0733F95B}"/>
               </a:ext>
             </a:extLst>
           </p:cNvPr>
@@ -11926,7 +11934,7 @@
           <p:cNvPr id="3" name="">
             <a:extLst xmlns:a="http://schemas.openxmlformats.org/drawingml/2006/main">
               <a:ext uri="{FF2B5EF4-FFF2-40B4-BE49-F238E27FC236}">
-                <a16:creationId xmlns:a16="http://schemas.microsoft.com/office/drawing/2014/main" id="{CDBDF17C-F42B-44AD-B503-8F6637239E2F}"/>
+                <a16:creationId xmlns:a16="http://schemas.microsoft.com/office/drawing/2014/main" id="{AB82951C-E7AD-4935-BA97-978F83474E99}"/>
               </a:ext>
             </a:extLst>
           </p:cNvPr>
@@ -11958,7 +11966,7 @@
           <p:cNvPr id="4" name="">
             <a:extLst xmlns:a="http://schemas.openxmlformats.org/drawingml/2006/main">
               <a:ext uri="{FF2B5EF4-FFF2-40B4-BE49-F238E27FC236}">
-                <a16:creationId xmlns:a16="http://schemas.microsoft.com/office/drawing/2014/main" id="{04E9A226-D636-4C71-9A44-F183E7B53553}"/>
+                <a16:creationId xmlns:a16="http://schemas.microsoft.com/office/drawing/2014/main" id="{7F0B17E2-7FDD-4005-8756-F5F2B2997655}"/>
               </a:ext>
             </a:extLst>
           </p:cNvPr>
@@ -12015,7 +12023,7 @@
           <p:cNvPr id="5" name="">
             <a:extLst xmlns:a="http://schemas.openxmlformats.org/drawingml/2006/main">
               <a:ext uri="{FF2B5EF4-FFF2-40B4-BE49-F238E27FC236}">
-                <a16:creationId xmlns:a16="http://schemas.microsoft.com/office/drawing/2014/main" id="{0EC23424-44BC-407C-897B-7E1FB353F7AC}"/>
+                <a16:creationId xmlns:a16="http://schemas.microsoft.com/office/drawing/2014/main" id="{2FCE02FF-265B-4EB2-B80D-48C864B6D67E}"/>
               </a:ext>
             </a:extLst>
           </p:cNvPr>
@@ -12072,7 +12080,7 @@
           <p:cNvPr id="6" name="">
             <a:extLst xmlns:a="http://schemas.openxmlformats.org/drawingml/2006/main">
               <a:ext uri="{FF2B5EF4-FFF2-40B4-BE49-F238E27FC236}">
-                <a16:creationId xmlns:a16="http://schemas.microsoft.com/office/drawing/2014/main" id="{A2D14736-EC9F-462E-8A5E-0D61DE1B1060}"/>
+                <a16:creationId xmlns:a16="http://schemas.microsoft.com/office/drawing/2014/main" id="{6ED3CA46-E15A-4B10-9329-79F6E854C579}"/>
               </a:ext>
             </a:extLst>
           </p:cNvPr>
@@ -12129,7 +12137,7 @@
           <p:cNvPr id="7" name="">
             <a:extLst xmlns:a="http://schemas.openxmlformats.org/drawingml/2006/main">
               <a:ext uri="{FF2B5EF4-FFF2-40B4-BE49-F238E27FC236}">
-                <a16:creationId xmlns:a16="http://schemas.microsoft.com/office/drawing/2014/main" id="{6025F696-0285-4341-8FEF-32EEDBDDB82C}"/>
+                <a16:creationId xmlns:a16="http://schemas.microsoft.com/office/drawing/2014/main" id="{D4EDEB27-8B84-459C-9812-0A2A9C031718}"/>
               </a:ext>
             </a:extLst>
           </p:cNvPr>
@@ -12161,7 +12169,7 @@
           <p:cNvPr id="8" name="">
             <a:extLst xmlns:a="http://schemas.openxmlformats.org/drawingml/2006/main">
               <a:ext uri="{FF2B5EF4-FFF2-40B4-BE49-F238E27FC236}">
-                <a16:creationId xmlns:a16="http://schemas.microsoft.com/office/drawing/2014/main" id="{36902D3B-0A20-4E1C-8F53-169C57E6DACD}"/>
+                <a16:creationId xmlns:a16="http://schemas.microsoft.com/office/drawing/2014/main" id="{BA854CEB-D164-494A-A512-8785BB3D7CB3}"/>
               </a:ext>
             </a:extLst>
           </p:cNvPr>
@@ -12218,7 +12226,7 @@
           <p:cNvPr id="9" name="">
             <a:extLst xmlns:a="http://schemas.openxmlformats.org/drawingml/2006/main">
               <a:ext uri="{FF2B5EF4-FFF2-40B4-BE49-F238E27FC236}">
-                <a16:creationId xmlns:a16="http://schemas.microsoft.com/office/drawing/2014/main" id="{776AADC3-159E-4C6A-ADD6-6CCAFF6A7948}"/>
+                <a16:creationId xmlns:a16="http://schemas.microsoft.com/office/drawing/2014/main" id="{1B12AA50-5316-4B8E-856C-44B8B9DAEF28}"/>
               </a:ext>
             </a:extLst>
           </p:cNvPr>
@@ -12275,7 +12283,7 @@
           <p:cNvPr id="10" name="">
             <a:extLst xmlns:a="http://schemas.openxmlformats.org/drawingml/2006/main">
               <a:ext uri="{FF2B5EF4-FFF2-40B4-BE49-F238E27FC236}">
-                <a16:creationId xmlns:a16="http://schemas.microsoft.com/office/drawing/2014/main" id="{307FBE83-D447-4FC9-8109-A8732FE0573B}"/>
+                <a16:creationId xmlns:a16="http://schemas.microsoft.com/office/drawing/2014/main" id="{2708C7A1-7291-4243-A69E-240A47668F0B}"/>
               </a:ext>
             </a:extLst>
           </p:cNvPr>
@@ -12309,7 +12317,7 @@
           <p:cNvPr id="11" name="">
             <a:extLst xmlns:a="http://schemas.openxmlformats.org/drawingml/2006/main">
               <a:ext uri="{FF2B5EF4-FFF2-40B4-BE49-F238E27FC236}">
-                <a16:creationId xmlns:a16="http://schemas.microsoft.com/office/drawing/2014/main" id="{3A31C2FB-3700-44BE-9C32-C34AE6C45EC7}"/>
+                <a16:creationId xmlns:a16="http://schemas.microsoft.com/office/drawing/2014/main" id="{BAA1FD67-7AE6-4990-BBF1-0D96C5D446F9}"/>
               </a:ext>
             </a:extLst>
           </p:cNvPr>
@@ -12341,7 +12349,7 @@
           <p:cNvPr id="12" name="">
             <a:extLst xmlns:a="http://schemas.openxmlformats.org/drawingml/2006/main">
               <a:ext uri="{FF2B5EF4-FFF2-40B4-BE49-F238E27FC236}">
-                <a16:creationId xmlns:a16="http://schemas.microsoft.com/office/drawing/2014/main" id="{56777B44-9354-47E2-A2B0-DE989A156E14}"/>
+                <a16:creationId xmlns:a16="http://schemas.microsoft.com/office/drawing/2014/main" id="{25612A8D-94E5-4382-9828-4DE6988B5CDB}"/>
               </a:ext>
             </a:extLst>
           </p:cNvPr>
@@ -12398,7 +12406,7 @@
           <p:cNvPr id="13" name="">
             <a:extLst xmlns:a="http://schemas.openxmlformats.org/drawingml/2006/main">
               <a:ext uri="{FF2B5EF4-FFF2-40B4-BE49-F238E27FC236}">
-                <a16:creationId xmlns:a16="http://schemas.microsoft.com/office/drawing/2014/main" id="{081EC709-A30D-4747-ADD1-10A54CEEF086}"/>
+                <a16:creationId xmlns:a16="http://schemas.microsoft.com/office/drawing/2014/main" id="{901A1841-376C-4219-8C44-BED3CEEAC205}"/>
               </a:ext>
             </a:extLst>
           </p:cNvPr>
@@ -12455,7 +12463,7 @@
           <p:cNvPr id="14" name="">
             <a:extLst xmlns:a="http://schemas.openxmlformats.org/drawingml/2006/main">
               <a:ext uri="{FF2B5EF4-FFF2-40B4-BE49-F238E27FC236}">
-                <a16:creationId xmlns:a16="http://schemas.microsoft.com/office/drawing/2014/main" id="{68C49222-566D-4815-A97F-72AF1C72037B}"/>
+                <a16:creationId xmlns:a16="http://schemas.microsoft.com/office/drawing/2014/main" id="{A47E99CF-C4A7-4B95-B971-136D0F26B5E1}"/>
               </a:ext>
             </a:extLst>
           </p:cNvPr>
@@ -12489,7 +12497,7 @@
           <p:cNvPr id="15" name="">
             <a:extLst xmlns:a="http://schemas.openxmlformats.org/drawingml/2006/main">
               <a:ext uri="{FF2B5EF4-FFF2-40B4-BE49-F238E27FC236}">
-                <a16:creationId xmlns:a16="http://schemas.microsoft.com/office/drawing/2014/main" id="{ADC44C65-C1E0-4E79-A33E-7510F63BA0B6}"/>
+                <a16:creationId xmlns:a16="http://schemas.microsoft.com/office/drawing/2014/main" id="{F0B1C37C-5333-4968-9158-E0712E682EC0}"/>
               </a:ext>
             </a:extLst>
           </p:cNvPr>
@@ -12521,7 +12529,7 @@
           <p:cNvPr id="16" name="">
             <a:extLst xmlns:a="http://schemas.openxmlformats.org/drawingml/2006/main">
               <a:ext uri="{FF2B5EF4-FFF2-40B4-BE49-F238E27FC236}">
-                <a16:creationId xmlns:a16="http://schemas.microsoft.com/office/drawing/2014/main" id="{56AAA9BA-F296-45EF-88C1-D393B8950609}"/>
+                <a16:creationId xmlns:a16="http://schemas.microsoft.com/office/drawing/2014/main" id="{0B53123E-201B-4215-A9EE-9844ABAE93D1}"/>
               </a:ext>
             </a:extLst>
           </p:cNvPr>
@@ -12578,7 +12586,7 @@
           <p:cNvPr id="17" name="">
             <a:extLst xmlns:a="http://schemas.openxmlformats.org/drawingml/2006/main">
               <a:ext uri="{FF2B5EF4-FFF2-40B4-BE49-F238E27FC236}">
-                <a16:creationId xmlns:a16="http://schemas.microsoft.com/office/drawing/2014/main" id="{67AC4056-F777-4B81-B447-CB5B13511302}"/>
+                <a16:creationId xmlns:a16="http://schemas.microsoft.com/office/drawing/2014/main" id="{5914CE33-50A3-4C02-BE36-CF08D43B5258}"/>
               </a:ext>
             </a:extLst>
           </p:cNvPr>
@@ -12635,7 +12643,7 @@
           <p:cNvPr id="18" name="">
             <a:extLst xmlns:a="http://schemas.openxmlformats.org/drawingml/2006/main">
               <a:ext uri="{FF2B5EF4-FFF2-40B4-BE49-F238E27FC236}">
-                <a16:creationId xmlns:a16="http://schemas.microsoft.com/office/drawing/2014/main" id="{46983E53-AB98-4802-ADC4-0542742CB5C7}"/>
+                <a16:creationId xmlns:a16="http://schemas.microsoft.com/office/drawing/2014/main" id="{C089A233-E10D-48E9-A835-A347317916D5}"/>
               </a:ext>
             </a:extLst>
           </p:cNvPr>
@@ -12669,7 +12677,7 @@
           <p:cNvPr id="19" name="">
             <a:extLst xmlns:a="http://schemas.openxmlformats.org/drawingml/2006/main">
               <a:ext uri="{FF2B5EF4-FFF2-40B4-BE49-F238E27FC236}">
-                <a16:creationId xmlns:a16="http://schemas.microsoft.com/office/drawing/2014/main" id="{535BBF55-1BCD-4091-9EFA-9C5FB7D0C39F}"/>
+                <a16:creationId xmlns:a16="http://schemas.microsoft.com/office/drawing/2014/main" id="{16B45916-DB71-4FDA-A764-00A1C80B2594}"/>
               </a:ext>
             </a:extLst>
           </p:cNvPr>
@@ -12701,7 +12709,7 @@
           <p:cNvPr id="20" name="">
             <a:extLst xmlns:a="http://schemas.openxmlformats.org/drawingml/2006/main">
               <a:ext uri="{FF2B5EF4-FFF2-40B4-BE49-F238E27FC236}">
-                <a16:creationId xmlns:a16="http://schemas.microsoft.com/office/drawing/2014/main" id="{EF67538E-D945-4B64-A2C3-AE96470BC291}"/>
+                <a16:creationId xmlns:a16="http://schemas.microsoft.com/office/drawing/2014/main" id="{57DA2F20-9EB6-4AEE-9E41-F46AB652BD0B}"/>
               </a:ext>
             </a:extLst>
           </p:cNvPr>
@@ -12758,7 +12766,7 @@
           <p:cNvPr id="21" name="">
             <a:extLst xmlns:a="http://schemas.openxmlformats.org/drawingml/2006/main">
               <a:ext uri="{FF2B5EF4-FFF2-40B4-BE49-F238E27FC236}">
-                <a16:creationId xmlns:a16="http://schemas.microsoft.com/office/drawing/2014/main" id="{FA6F6973-203A-4040-8E7B-405C843347D8}"/>
+                <a16:creationId xmlns:a16="http://schemas.microsoft.com/office/drawing/2014/main" id="{FBD805F1-1D72-4826-8C01-18BD3E9D35BE}"/>
               </a:ext>
             </a:extLst>
           </p:cNvPr>
@@ -12815,7 +12823,7 @@
           <p:cNvPr id="22" name="">
             <a:extLst xmlns:a="http://schemas.openxmlformats.org/drawingml/2006/main">
               <a:ext uri="{FF2B5EF4-FFF2-40B4-BE49-F238E27FC236}">
-                <a16:creationId xmlns:a16="http://schemas.microsoft.com/office/drawing/2014/main" id="{9FF2F736-8DE7-4FF7-871F-7511D137F974}"/>
+                <a16:creationId xmlns:a16="http://schemas.microsoft.com/office/drawing/2014/main" id="{746CBB57-51D4-4BCD-AFA8-44C6659C9014}"/>
               </a:ext>
             </a:extLst>
           </p:cNvPr>
@@ -12870,7 +12878,7 @@
     </p:spTree>
     <p:extLst>
       <p:ext uri="{BB962C8B-B14F-4D97-AF65-F5344CB8AC3E}">
-        <p14:creationId xmlns:p14="http://schemas.microsoft.com/office/powerpoint/2010/main" val="1695217393"/>
+        <p14:creationId xmlns:p14="http://schemas.microsoft.com/office/powerpoint/2010/main" val="196192190"/>
       </p:ext>
     </p:extLst>
   </p:cSld>
@@ -13071,7 +13079,7 @@
           <p:cNvPr id="22" name="">
             <a:extLst xmlns:a="http://schemas.openxmlformats.org/drawingml/2006/main">
               <a:ext uri="{FF2B5EF4-FFF2-40B4-BE49-F238E27FC236}">
-                <a16:creationId xmlns:a16="http://schemas.microsoft.com/office/drawing/2014/main" id="{AA1698D7-4D1C-4ADD-8EB9-7AB24D8AF9EB}"/>
+                <a16:creationId xmlns:a16="http://schemas.microsoft.com/office/drawing/2014/main" id="{28E8FE0D-2CA0-40BA-836D-CA21F779EEA8}"/>
               </a:ext>
             </a:extLst>
           </p:cNvPr>
@@ -13103,7 +13111,7 @@
           <p:cNvPr id="2" name="">
             <a:extLst xmlns:a="http://schemas.openxmlformats.org/drawingml/2006/main">
               <a:ext uri="{FF2B5EF4-FFF2-40B4-BE49-F238E27FC236}">
-                <a16:creationId xmlns:a16="http://schemas.microsoft.com/office/drawing/2014/main" id="{38D494B2-E2E2-4EFA-B0E7-01CED04783B3}"/>
+                <a16:creationId xmlns:a16="http://schemas.microsoft.com/office/drawing/2014/main" id="{BA4C5FA3-AEC3-4EEE-A1D4-D317AFDCA21E}"/>
               </a:ext>
             </a:extLst>
           </p:cNvPr>
@@ -13160,7 +13168,7 @@
           <p:cNvPr id="3" name="">
             <a:extLst xmlns:a="http://schemas.openxmlformats.org/drawingml/2006/main">
               <a:ext uri="{FF2B5EF4-FFF2-40B4-BE49-F238E27FC236}">
-                <a16:creationId xmlns:a16="http://schemas.microsoft.com/office/drawing/2014/main" id="{E910B3C3-FEAC-4602-97D9-F60427450365}"/>
+                <a16:creationId xmlns:a16="http://schemas.microsoft.com/office/drawing/2014/main" id="{FA1F8235-E2E8-41A3-98C0-5164F9018109}"/>
               </a:ext>
             </a:extLst>
           </p:cNvPr>
@@ -13192,7 +13200,7 @@
           <p:cNvPr id="4" name="">
             <a:extLst xmlns:a="http://schemas.openxmlformats.org/drawingml/2006/main">
               <a:ext uri="{FF2B5EF4-FFF2-40B4-BE49-F238E27FC236}">
-                <a16:creationId xmlns:a16="http://schemas.microsoft.com/office/drawing/2014/main" id="{E06E0B9A-782E-4125-A0C4-3F0B9999EE4A}"/>
+                <a16:creationId xmlns:a16="http://schemas.microsoft.com/office/drawing/2014/main" id="{3A5F6C08-9E9A-4026-9D38-6CFBC8448404}"/>
               </a:ext>
             </a:extLst>
           </p:cNvPr>
@@ -13249,7 +13257,7 @@
           <p:cNvPr id="5" name="">
             <a:extLst xmlns:a="http://schemas.openxmlformats.org/drawingml/2006/main">
               <a:ext uri="{FF2B5EF4-FFF2-40B4-BE49-F238E27FC236}">
-                <a16:creationId xmlns:a16="http://schemas.microsoft.com/office/drawing/2014/main" id="{059AF52E-6DFB-433B-B352-D496C43BE522}"/>
+                <a16:creationId xmlns:a16="http://schemas.microsoft.com/office/drawing/2014/main" id="{13019A03-B2AA-47D2-A8E9-96201A1263D8}"/>
               </a:ext>
             </a:extLst>
           </p:cNvPr>
@@ -13306,7 +13314,7 @@
           <p:cNvPr id="6" name="">
             <a:extLst xmlns:a="http://schemas.openxmlformats.org/drawingml/2006/main">
               <a:ext uri="{FF2B5EF4-FFF2-40B4-BE49-F238E27FC236}">
-                <a16:creationId xmlns:a16="http://schemas.microsoft.com/office/drawing/2014/main" id="{CF19FAAF-8F2C-465B-BB6B-53B810AEA412}"/>
+                <a16:creationId xmlns:a16="http://schemas.microsoft.com/office/drawing/2014/main" id="{80CC1321-8EFF-44D0-8FB5-8A6C39E2B6AA}"/>
               </a:ext>
             </a:extLst>
           </p:cNvPr>
@@ -13363,7 +13371,7 @@
           <p:cNvPr id="7" name="">
             <a:extLst xmlns:a="http://schemas.openxmlformats.org/drawingml/2006/main">
               <a:ext uri="{FF2B5EF4-FFF2-40B4-BE49-F238E27FC236}">
-                <a16:creationId xmlns:a16="http://schemas.microsoft.com/office/drawing/2014/main" id="{74274BD9-C7D9-4099-B678-6F9A23C74870}"/>
+                <a16:creationId xmlns:a16="http://schemas.microsoft.com/office/drawing/2014/main" id="{26FB2D0F-E884-47B1-AEDB-E4DD410CDF4D}"/>
               </a:ext>
             </a:extLst>
           </p:cNvPr>
@@ -13395,7 +13403,7 @@
           <p:cNvPr id="8" name="">
             <a:extLst xmlns:a="http://schemas.openxmlformats.org/drawingml/2006/main">
               <a:ext uri="{FF2B5EF4-FFF2-40B4-BE49-F238E27FC236}">
-                <a16:creationId xmlns:a16="http://schemas.microsoft.com/office/drawing/2014/main" id="{C4E63AC6-C9C8-4FE9-9F1B-1ABF11C1085E}"/>
+                <a16:creationId xmlns:a16="http://schemas.microsoft.com/office/drawing/2014/main" id="{F7CB6801-34E1-402B-80AD-59B988732206}"/>
               </a:ext>
             </a:extLst>
           </p:cNvPr>
@@ -13452,7 +13460,7 @@
           <p:cNvPr id="9" name="">
             <a:extLst xmlns:a="http://schemas.openxmlformats.org/drawingml/2006/main">
               <a:ext uri="{FF2B5EF4-FFF2-40B4-BE49-F238E27FC236}">
-                <a16:creationId xmlns:a16="http://schemas.microsoft.com/office/drawing/2014/main" id="{5F65EED4-8E5C-4430-8937-17D6BE43F06A}"/>
+                <a16:creationId xmlns:a16="http://schemas.microsoft.com/office/drawing/2014/main" id="{4378A726-3114-42F3-BCE1-7BBEACB4B6AD}"/>
               </a:ext>
             </a:extLst>
           </p:cNvPr>
@@ -13509,7 +13517,7 @@
           <p:cNvPr id="10" name="">
             <a:extLst xmlns:a="http://schemas.openxmlformats.org/drawingml/2006/main">
               <a:ext uri="{FF2B5EF4-FFF2-40B4-BE49-F238E27FC236}">
-                <a16:creationId xmlns:a16="http://schemas.microsoft.com/office/drawing/2014/main" id="{659CE47D-DC30-42BE-9219-58AD1A3FC261}"/>
+                <a16:creationId xmlns:a16="http://schemas.microsoft.com/office/drawing/2014/main" id="{1D1E81B6-3C82-4E19-8897-C0F0618C4357}"/>
               </a:ext>
             </a:extLst>
           </p:cNvPr>
@@ -13543,7 +13551,7 @@
           <p:cNvPr id="11" name="">
             <a:extLst xmlns:a="http://schemas.openxmlformats.org/drawingml/2006/main">
               <a:ext uri="{FF2B5EF4-FFF2-40B4-BE49-F238E27FC236}">
-                <a16:creationId xmlns:a16="http://schemas.microsoft.com/office/drawing/2014/main" id="{8F1D8008-AE1C-43CE-A315-D70369A753EB}"/>
+                <a16:creationId xmlns:a16="http://schemas.microsoft.com/office/drawing/2014/main" id="{B7223B72-F53F-422E-A81E-7273C40897B1}"/>
               </a:ext>
             </a:extLst>
           </p:cNvPr>
@@ -13575,7 +13583,7 @@
           <p:cNvPr id="12" name="">
             <a:extLst xmlns:a="http://schemas.openxmlformats.org/drawingml/2006/main">
               <a:ext uri="{FF2B5EF4-FFF2-40B4-BE49-F238E27FC236}">
-                <a16:creationId xmlns:a16="http://schemas.microsoft.com/office/drawing/2014/main" id="{1CF9127E-3D8D-454B-9FEC-FD74A5C79664}"/>
+                <a16:creationId xmlns:a16="http://schemas.microsoft.com/office/drawing/2014/main" id="{EA0805E0-84A7-4533-B74A-DFA244DD83D8}"/>
               </a:ext>
             </a:extLst>
           </p:cNvPr>
@@ -13632,7 +13640,7 @@
           <p:cNvPr id="13" name="">
             <a:extLst xmlns:a="http://schemas.openxmlformats.org/drawingml/2006/main">
               <a:ext uri="{FF2B5EF4-FFF2-40B4-BE49-F238E27FC236}">
-                <a16:creationId xmlns:a16="http://schemas.microsoft.com/office/drawing/2014/main" id="{A02A8BCD-C55A-4FB6-BB76-D74E9D82262D}"/>
+                <a16:creationId xmlns:a16="http://schemas.microsoft.com/office/drawing/2014/main" id="{D67B11FF-3FB5-49D4-AD10-849BC708158B}"/>
               </a:ext>
             </a:extLst>
           </p:cNvPr>
@@ -13689,7 +13697,7 @@
           <p:cNvPr id="14" name="">
             <a:extLst xmlns:a="http://schemas.openxmlformats.org/drawingml/2006/main">
               <a:ext uri="{FF2B5EF4-FFF2-40B4-BE49-F238E27FC236}">
-                <a16:creationId xmlns:a16="http://schemas.microsoft.com/office/drawing/2014/main" id="{C3ACC00B-CEC1-4E32-B1EA-C546E1B59772}"/>
+                <a16:creationId xmlns:a16="http://schemas.microsoft.com/office/drawing/2014/main" id="{F4ECD003-2EE9-40BA-B29F-EE9F54F78AFC}"/>
               </a:ext>
             </a:extLst>
           </p:cNvPr>
@@ -13723,7 +13731,7 @@
           <p:cNvPr id="15" name="">
             <a:extLst xmlns:a="http://schemas.openxmlformats.org/drawingml/2006/main">
               <a:ext uri="{FF2B5EF4-FFF2-40B4-BE49-F238E27FC236}">
-                <a16:creationId xmlns:a16="http://schemas.microsoft.com/office/drawing/2014/main" id="{FF609804-6232-4ADD-BF59-7F7919DD0CDE}"/>
+                <a16:creationId xmlns:a16="http://schemas.microsoft.com/office/drawing/2014/main" id="{883EF03D-87A8-46C1-AB4B-A8C21584FD84}"/>
               </a:ext>
             </a:extLst>
           </p:cNvPr>
@@ -13755,7 +13763,7 @@
           <p:cNvPr id="16" name="">
             <a:extLst xmlns:a="http://schemas.openxmlformats.org/drawingml/2006/main">
               <a:ext uri="{FF2B5EF4-FFF2-40B4-BE49-F238E27FC236}">
-                <a16:creationId xmlns:a16="http://schemas.microsoft.com/office/drawing/2014/main" id="{C5F6099A-A5D9-4FFC-8D76-2B8571FF20B3}"/>
+                <a16:creationId xmlns:a16="http://schemas.microsoft.com/office/drawing/2014/main" id="{109509E2-C15D-4DC5-A73B-77D665619444}"/>
               </a:ext>
             </a:extLst>
           </p:cNvPr>
@@ -13812,7 +13820,7 @@
           <p:cNvPr id="17" name="">
             <a:extLst xmlns:a="http://schemas.openxmlformats.org/drawingml/2006/main">
               <a:ext uri="{FF2B5EF4-FFF2-40B4-BE49-F238E27FC236}">
-                <a16:creationId xmlns:a16="http://schemas.microsoft.com/office/drawing/2014/main" id="{08B6E1E9-3317-4951-B5C7-7A0696705553}"/>
+                <a16:creationId xmlns:a16="http://schemas.microsoft.com/office/drawing/2014/main" id="{567411A4-6CDF-4969-83C6-E5A8A7681FA4}"/>
               </a:ext>
             </a:extLst>
           </p:cNvPr>
@@ -13869,7 +13877,7 @@
           <p:cNvPr id="18" name="">
             <a:extLst xmlns:a="http://schemas.openxmlformats.org/drawingml/2006/main">
               <a:ext uri="{FF2B5EF4-FFF2-40B4-BE49-F238E27FC236}">
-                <a16:creationId xmlns:a16="http://schemas.microsoft.com/office/drawing/2014/main" id="{1725C9BA-C9AE-41B3-9F3E-ADFEF5D9D25F}"/>
+                <a16:creationId xmlns:a16="http://schemas.microsoft.com/office/drawing/2014/main" id="{9EDA5F53-96D6-4084-B483-319EC05AE1F6}"/>
               </a:ext>
             </a:extLst>
           </p:cNvPr>
@@ -13903,7 +13911,7 @@
           <p:cNvPr id="19" name="">
             <a:extLst xmlns:a="http://schemas.openxmlformats.org/drawingml/2006/main">
               <a:ext uri="{FF2B5EF4-FFF2-40B4-BE49-F238E27FC236}">
-                <a16:creationId xmlns:a16="http://schemas.microsoft.com/office/drawing/2014/main" id="{7F6A27CA-0A1B-4CA2-B92F-4758384213AF}"/>
+                <a16:creationId xmlns:a16="http://schemas.microsoft.com/office/drawing/2014/main" id="{198EF1D1-A39F-4AB6-BCCB-15FDE1AC9154}"/>
               </a:ext>
             </a:extLst>
           </p:cNvPr>
@@ -13935,7 +13943,7 @@
           <p:cNvPr id="20" name="">
             <a:extLst xmlns:a="http://schemas.openxmlformats.org/drawingml/2006/main">
               <a:ext uri="{FF2B5EF4-FFF2-40B4-BE49-F238E27FC236}">
-                <a16:creationId xmlns:a16="http://schemas.microsoft.com/office/drawing/2014/main" id="{55C1CC9E-1F0B-4BB0-8705-C42BE927D62E}"/>
+                <a16:creationId xmlns:a16="http://schemas.microsoft.com/office/drawing/2014/main" id="{4F5BEA23-5A51-44A2-B9EF-CBFB4A06D678}"/>
               </a:ext>
             </a:extLst>
           </p:cNvPr>
@@ -13992,7 +14000,7 @@
           <p:cNvPr id="21" name="">
             <a:extLst xmlns:a="http://schemas.openxmlformats.org/drawingml/2006/main">
               <a:ext uri="{FF2B5EF4-FFF2-40B4-BE49-F238E27FC236}">
-                <a16:creationId xmlns:a16="http://schemas.microsoft.com/office/drawing/2014/main" id="{070B5103-D35F-4B6C-ADD6-512D5E16AA17}"/>
+                <a16:creationId xmlns:a16="http://schemas.microsoft.com/office/drawing/2014/main" id="{EAA8917F-ABE7-4455-9015-94D8F1D83336}"/>
               </a:ext>
             </a:extLst>
           </p:cNvPr>
@@ -14047,7 +14055,7 @@
     </p:spTree>
     <p:extLst>
       <p:ext uri="{BB962C8B-B14F-4D97-AF65-F5344CB8AC3E}">
-        <p14:creationId xmlns:p14="http://schemas.microsoft.com/office/powerpoint/2010/main" val="1480026325"/>
+        <p14:creationId xmlns:p14="http://schemas.microsoft.com/office/powerpoint/2010/main" val="1932889817"/>
       </p:ext>
     </p:extLst>
   </p:cSld>
